--- a/Sign2Notes.pptx
+++ b/Sign2Notes.pptx
@@ -8,15 +8,14 @@
     <p:sldId id="256" r:id="rId2"/>
     <p:sldId id="257" r:id="rId3"/>
     <p:sldId id="258" r:id="rId4"/>
-    <p:sldId id="259" r:id="rId5"/>
-    <p:sldId id="260" r:id="rId6"/>
-    <p:sldId id="261" r:id="rId7"/>
-    <p:sldId id="262" r:id="rId8"/>
-    <p:sldId id="267" r:id="rId9"/>
-    <p:sldId id="266" r:id="rId10"/>
-    <p:sldId id="263" r:id="rId11"/>
-    <p:sldId id="264" r:id="rId12"/>
-    <p:sldId id="265" r:id="rId13"/>
+    <p:sldId id="261" r:id="rId5"/>
+    <p:sldId id="262" r:id="rId6"/>
+    <p:sldId id="267" r:id="rId7"/>
+    <p:sldId id="266" r:id="rId8"/>
+    <p:sldId id="268" r:id="rId9"/>
+    <p:sldId id="269" r:id="rId10"/>
+    <p:sldId id="265" r:id="rId11"/>
+    <p:sldId id="270" r:id="rId12"/>
   </p:sldIdLst>
   <p:sldSz cx="12192000" cy="6858000"/>
   <p:notesSz cx="6858000" cy="9144000"/>
@@ -349,7 +348,7 @@
           <a:p>
             <a:fld id="{3E387D70-1183-4AF0-B0A1-0C462F4564CD}" type="datetimeFigureOut">
               <a:rPr lang="en-IN" smtClean="0"/>
-              <a:t>13-09-2025</a:t>
+              <a:t>13-02-2026</a:t>
             </a:fld>
             <a:endParaRPr lang="en-IN"/>
           </a:p>
@@ -557,7 +556,7 @@
           <a:p>
             <a:fld id="{3E387D70-1183-4AF0-B0A1-0C462F4564CD}" type="datetimeFigureOut">
               <a:rPr lang="en-IN" smtClean="0"/>
-              <a:t>13-09-2025</a:t>
+              <a:t>13-02-2026</a:t>
             </a:fld>
             <a:endParaRPr lang="en-IN"/>
           </a:p>
@@ -813,7 +812,7 @@
           <a:p>
             <a:fld id="{3E387D70-1183-4AF0-B0A1-0C462F4564CD}" type="datetimeFigureOut">
               <a:rPr lang="en-IN" smtClean="0"/>
-              <a:t>13-09-2025</a:t>
+              <a:t>13-02-2026</a:t>
             </a:fld>
             <a:endParaRPr lang="en-IN"/>
           </a:p>
@@ -987,7 +986,7 @@
           <a:p>
             <a:fld id="{3E387D70-1183-4AF0-B0A1-0C462F4564CD}" type="datetimeFigureOut">
               <a:rPr lang="en-IN" smtClean="0"/>
-              <a:t>13-09-2025</a:t>
+              <a:t>13-02-2026</a:t>
             </a:fld>
             <a:endParaRPr lang="en-IN"/>
           </a:p>
@@ -1330,7 +1329,7 @@
           <a:p>
             <a:fld id="{3E387D70-1183-4AF0-B0A1-0C462F4564CD}" type="datetimeFigureOut">
               <a:rPr lang="en-IN" smtClean="0"/>
-              <a:t>13-09-2025</a:t>
+              <a:t>13-02-2026</a:t>
             </a:fld>
             <a:endParaRPr lang="en-IN"/>
           </a:p>
@@ -1605,7 +1604,7 @@
           <a:p>
             <a:fld id="{3E387D70-1183-4AF0-B0A1-0C462F4564CD}" type="datetimeFigureOut">
               <a:rPr lang="en-IN" smtClean="0"/>
-              <a:t>13-09-2025</a:t>
+              <a:t>13-02-2026</a:t>
             </a:fld>
             <a:endParaRPr lang="en-IN"/>
           </a:p>
@@ -1984,7 +1983,7 @@
           <a:p>
             <a:fld id="{3E387D70-1183-4AF0-B0A1-0C462F4564CD}" type="datetimeFigureOut">
               <a:rPr lang="en-IN" smtClean="0"/>
-              <a:t>13-09-2025</a:t>
+              <a:t>13-02-2026</a:t>
             </a:fld>
             <a:endParaRPr lang="en-IN"/>
           </a:p>
@@ -2102,7 +2101,7 @@
           <a:p>
             <a:fld id="{3E387D70-1183-4AF0-B0A1-0C462F4564CD}" type="datetimeFigureOut">
               <a:rPr lang="en-IN" smtClean="0"/>
-              <a:t>13-09-2025</a:t>
+              <a:t>13-02-2026</a:t>
             </a:fld>
             <a:endParaRPr lang="en-IN"/>
           </a:p>
@@ -2273,7 +2272,7 @@
           <a:p>
             <a:fld id="{3E387D70-1183-4AF0-B0A1-0C462F4564CD}" type="datetimeFigureOut">
               <a:rPr lang="en-IN" smtClean="0"/>
-              <a:t>13-09-2025</a:t>
+              <a:t>13-02-2026</a:t>
             </a:fld>
             <a:endParaRPr lang="en-IN"/>
           </a:p>
@@ -2627,7 +2626,7 @@
           <a:p>
             <a:fld id="{3E387D70-1183-4AF0-B0A1-0C462F4564CD}" type="datetimeFigureOut">
               <a:rPr lang="en-IN" smtClean="0"/>
-              <a:t>13-09-2025</a:t>
+              <a:t>13-02-2026</a:t>
             </a:fld>
             <a:endParaRPr lang="en-IN"/>
           </a:p>
@@ -3009,7 +3008,7 @@
           <a:p>
             <a:fld id="{3E387D70-1183-4AF0-B0A1-0C462F4564CD}" type="datetimeFigureOut">
               <a:rPr lang="en-IN" smtClean="0"/>
-              <a:t>13-09-2025</a:t>
+              <a:t>13-02-2026</a:t>
             </a:fld>
             <a:endParaRPr lang="en-IN"/>
           </a:p>
@@ -3296,7 +3295,7 @@
           <a:p>
             <a:fld id="{3E387D70-1183-4AF0-B0A1-0C462F4564CD}" type="datetimeFigureOut">
               <a:rPr lang="en-IN" smtClean="0"/>
-              <a:t>13-09-2025</a:t>
+              <a:t>13-02-2026</a:t>
             </a:fld>
             <a:endParaRPr lang="en-IN"/>
           </a:p>
@@ -4001,7 +4000,7 @@
           <p:cNvPr id="2" name="Title 1">
             <a:extLst>
               <a:ext uri="{FF2B5EF4-FFF2-40B4-BE49-F238E27FC236}">
-                <a16:creationId xmlns:a16="http://schemas.microsoft.com/office/drawing/2014/main" id="{1B54F24D-3320-E92C-7A96-7F9B131D274B}"/>
+                <a16:creationId xmlns:a16="http://schemas.microsoft.com/office/drawing/2014/main" id="{8D0AD91D-BD8B-5A8C-D74E-DE3C472785AC}"/>
               </a:ext>
             </a:extLst>
           </p:cNvPr>
@@ -4020,10 +4019,10 @@
           <a:lstStyle/>
           <a:p>
             <a:r>
-              <a:rPr lang="en-US" sz="6000" dirty="0"/>
-              <a:t>Feasibility</a:t>
-            </a:r>
-            <a:endParaRPr lang="en-IN" sz="6000" dirty="0"/>
+              <a:rPr lang="en-US" sz="5400" dirty="0"/>
+              <a:t>Ethical Concerns &amp; Mitigations</a:t>
+            </a:r>
+            <a:endParaRPr lang="en-IN" sz="5400" dirty="0"/>
           </a:p>
         </p:txBody>
       </p:sp>
@@ -4032,7 +4031,7 @@
           <p:cNvPr id="3" name="Content Placeholder 2">
             <a:extLst>
               <a:ext uri="{FF2B5EF4-FFF2-40B4-BE49-F238E27FC236}">
-                <a16:creationId xmlns:a16="http://schemas.microsoft.com/office/drawing/2014/main" id="{A4098D94-BE2D-4B67-CB91-456BBE9B55A9}"/>
+                <a16:creationId xmlns:a16="http://schemas.microsoft.com/office/drawing/2014/main" id="{22C0E202-246B-95BD-60C5-E2AEAECCCB57}"/>
               </a:ext>
             </a:extLst>
           </p:cNvPr>
@@ -4043,12 +4042,7 @@
             <p:ph idx="1"/>
           </p:nvPr>
         </p:nvSpPr>
-        <p:spPr>
-          <a:xfrm>
-            <a:off x="1097279" y="1845734"/>
-            <a:ext cx="10742623" cy="4023360"/>
-          </a:xfrm>
-        </p:spPr>
+        <p:spPr/>
         <p:txBody>
           <a:bodyPr>
             <a:normAutofit/>
@@ -4060,8 +4054,8 @@
               <a:buChar char="•"/>
             </a:pPr>
             <a:r>
-              <a:rPr lang="en-IN" sz="2800" dirty="0"/>
-              <a:t>Narrow scope → low data requirement</a:t>
+              <a:rPr lang="en-IN" sz="2400" dirty="0"/>
+              <a:t>Consent: explicit consent for any recordings and dataset use.</a:t>
             </a:r>
           </a:p>
           <a:p>
@@ -4070,42 +4064,16 @@
               <a:buChar char="•"/>
             </a:pPr>
             <a:r>
-              <a:rPr lang="en-IN" sz="2800" dirty="0"/>
-              <a:t>Leverage existing OSS</a:t>
-            </a:r>
-          </a:p>
-          <a:p>
-            <a:pPr lvl="1">
-              <a:buFont typeface="Arial" panose="020B0604020202020204" pitchFamily="34" charset="0"/>
-              <a:buChar char="•"/>
-            </a:pPr>
-            <a:r>
-              <a:rPr lang="en-IN" sz="2600" dirty="0"/>
-              <a:t> </a:t>
-            </a:r>
-            <a:r>
-              <a:rPr lang="en-IN" sz="2600" dirty="0" err="1"/>
-              <a:t>MediaPipe</a:t>
-            </a:r>
-            <a:r>
-              <a:rPr lang="en-IN" sz="2600" dirty="0"/>
-              <a:t> for </a:t>
-            </a:r>
-            <a:r>
-              <a:rPr lang="en-IN" sz="2600" dirty="0" err="1"/>
-              <a:t>keypoints</a:t>
-            </a:r>
-            <a:r>
-              <a:rPr lang="en-IN" sz="2600" dirty="0"/>
-              <a:t>, lightweight </a:t>
-            </a:r>
-            <a:r>
-              <a:rPr lang="en-IN" sz="2600" dirty="0" err="1"/>
-              <a:t>PyTorch</a:t>
-            </a:r>
-            <a:r>
-              <a:rPr lang="en-IN" sz="2600" dirty="0"/>
-              <a:t>/ONNX models.</a:t>
+              <a:rPr lang="en-IN" sz="2400" dirty="0"/>
+              <a:t>Privacy: default to local </a:t>
+            </a:r>
+            <a:r>
+              <a:rPr lang="en-IN" sz="2400" dirty="0" err="1"/>
+              <a:t>keypoint</a:t>
+            </a:r>
+            <a:r>
+              <a:rPr lang="en-IN" sz="2400" dirty="0"/>
+              <a:t> extraction; do not store raw video; delete anonymized data after use.</a:t>
             </a:r>
           </a:p>
           <a:p>
@@ -4114,12 +4082,18 @@
               <a:buChar char="•"/>
             </a:pPr>
             <a:r>
-              <a:rPr lang="en-IN" sz="2800" dirty="0" err="1"/>
-              <a:t>Prototypeable</a:t>
-            </a:r>
-            <a:r>
-              <a:rPr lang="en-IN" sz="2800" dirty="0"/>
-              <a:t> within timeline.</a:t>
+              <a:rPr lang="en-IN" sz="2400" dirty="0"/>
+              <a:t>Transparency: clear disclaimer — “prototype, limited-vocab, not clinical/diagnostic.”</a:t>
+            </a:r>
+          </a:p>
+          <a:p>
+            <a:pPr>
+              <a:buFont typeface="Arial" panose="020B0604020202020204" pitchFamily="34" charset="0"/>
+              <a:buChar char="•"/>
+            </a:pPr>
+            <a:r>
+              <a:rPr lang="en-IN" sz="2400" dirty="0"/>
+              <a:t>Bias: acknowledge signer diversity—collect varied signer samples when possible.</a:t>
             </a:r>
           </a:p>
         </p:txBody>
@@ -4127,7 +4101,7 @@
     </p:spTree>
     <p:extLst>
       <p:ext uri="{BB962C8B-B14F-4D97-AF65-F5344CB8AC3E}">
-        <p14:creationId xmlns:p14="http://schemas.microsoft.com/office/powerpoint/2010/main" val="1143431823"/>
+        <p14:creationId xmlns:p14="http://schemas.microsoft.com/office/powerpoint/2010/main" val="2579856468"/>
       </p:ext>
     </p:extLst>
   </p:cSld>
@@ -4159,7 +4133,7 @@
           <p:cNvPr id="2" name="Title 1">
             <a:extLst>
               <a:ext uri="{FF2B5EF4-FFF2-40B4-BE49-F238E27FC236}">
-                <a16:creationId xmlns:a16="http://schemas.microsoft.com/office/drawing/2014/main" id="{ED914C2F-CC0C-E4B0-10BA-51B87728E4BC}"/>
+                <a16:creationId xmlns:a16="http://schemas.microsoft.com/office/drawing/2014/main" id="{38B2A208-B908-91A1-8D40-B6076E075E2D}"/>
               </a:ext>
             </a:extLst>
           </p:cNvPr>
@@ -4172,77 +4146,107 @@
         </p:nvSpPr>
         <p:spPr/>
         <p:txBody>
+          <a:bodyPr/>
+          <a:lstStyle/>
+          <a:p>
+            <a:r>
+              <a:rPr lang="en-IN" dirty="0"/>
+              <a:t>Sign2Note - </a:t>
+            </a:r>
+            <a:r>
+              <a:rPr lang="en-IN" sz="3600" dirty="0"/>
+              <a:t>Empowering Inclusive Education</a:t>
+            </a:r>
+            <a:endParaRPr lang="en-IN" dirty="0"/>
+          </a:p>
+        </p:txBody>
+      </p:sp>
+      <p:sp>
+        <p:nvSpPr>
+          <p:cNvPr id="3" name="Content Placeholder 2">
+            <a:extLst>
+              <a:ext uri="{FF2B5EF4-FFF2-40B4-BE49-F238E27FC236}">
+                <a16:creationId xmlns:a16="http://schemas.microsoft.com/office/drawing/2014/main" id="{207CD4E9-93A7-8C20-1E3C-8A208220C460}"/>
+              </a:ext>
+            </a:extLst>
+          </p:cNvPr>
+          <p:cNvSpPr>
+            <a:spLocks noGrp="1"/>
+          </p:cNvSpPr>
+          <p:nvPr>
+            <p:ph idx="1"/>
+          </p:nvPr>
+        </p:nvSpPr>
+        <p:spPr/>
+        <p:txBody>
           <a:bodyPr>
             <a:normAutofit/>
           </a:bodyPr>
           <a:lstStyle/>
           <a:p>
-            <a:r>
-              <a:rPr lang="en-US" sz="5400" dirty="0"/>
-              <a:t>Risk Analysis</a:t>
-            </a:r>
-            <a:endParaRPr lang="en-IN" sz="5400" dirty="0"/>
-          </a:p>
-        </p:txBody>
-      </p:sp>
-      <p:sp>
-        <p:nvSpPr>
-          <p:cNvPr id="3" name="Content Placeholder 2">
+            <a:pPr algn="ctr"/>
+            <a:r>
+              <a:rPr lang="en-IN" sz="3200" dirty="0"/>
+              <a:t>We aim to bridge communication gaps in classroom and make education accessible to learner.</a:t>
+            </a:r>
+          </a:p>
+        </p:txBody>
+      </p:sp>
+      <p:sp>
+        <p:nvSpPr>
+          <p:cNvPr id="4" name="Rectangle 3">
             <a:extLst>
               <a:ext uri="{FF2B5EF4-FFF2-40B4-BE49-F238E27FC236}">
-                <a16:creationId xmlns:a16="http://schemas.microsoft.com/office/drawing/2014/main" id="{A4F5D6E3-AD2E-B3D9-3755-6E668954BF84}"/>
+                <a16:creationId xmlns:a16="http://schemas.microsoft.com/office/drawing/2014/main" id="{71E2B361-B7F4-DC6C-0170-A5356F3A6C18}"/>
               </a:ext>
             </a:extLst>
           </p:cNvPr>
-          <p:cNvSpPr>
-            <a:spLocks noGrp="1"/>
-          </p:cNvSpPr>
-          <p:nvPr>
-            <p:ph idx="1"/>
-          </p:nvPr>
-        </p:nvSpPr>
-        <p:spPr/>
-        <p:txBody>
-          <a:bodyPr>
-            <a:normAutofit/>
+          <p:cNvSpPr/>
+          <p:nvPr/>
+        </p:nvSpPr>
+        <p:spPr>
+          <a:xfrm>
+            <a:off x="4028288" y="3395749"/>
+            <a:ext cx="4135427" cy="1200329"/>
+          </a:xfrm>
+          <a:prstGeom prst="rect">
+            <a:avLst/>
+          </a:prstGeom>
+          <a:noFill/>
+        </p:spPr>
+        <p:txBody>
+          <a:bodyPr wrap="none" lIns="91440" tIns="45720" rIns="91440" bIns="45720">
+            <a:spAutoFit/>
           </a:bodyPr>
           <a:lstStyle/>
           <a:p>
-            <a:pPr>
-              <a:buFont typeface="Wingdings" panose="05000000000000000000" pitchFamily="2" charset="2"/>
-              <a:buChar char="Ø"/>
-            </a:pPr>
-            <a:r>
-              <a:rPr lang="en-IN" sz="2800" dirty="0"/>
-              <a:t>Data variability: signer styles, lighting — mitigate with short team recordings + augmentation.</a:t>
-            </a:r>
-          </a:p>
-          <a:p>
-            <a:pPr>
-              <a:buFont typeface="Wingdings" panose="05000000000000000000" pitchFamily="2" charset="2"/>
-              <a:buChar char="Ø"/>
-            </a:pPr>
-            <a:r>
-              <a:rPr lang="en-IN" sz="2800" dirty="0"/>
-              <a:t>Model performance: limited vocabulary to keep accuracy high; use fallback messages on low confidence.</a:t>
-            </a:r>
-          </a:p>
-          <a:p>
-            <a:pPr>
-              <a:buFont typeface="Wingdings" panose="05000000000000000000" pitchFamily="2" charset="2"/>
-              <a:buChar char="Ø"/>
-            </a:pPr>
-            <a:r>
-              <a:rPr lang="en-IN" sz="2800" dirty="0"/>
-              <a:t>Privacy: prefer client inference; otherwise send only anonymized </a:t>
-            </a:r>
-            <a:r>
-              <a:rPr lang="en-IN" sz="2800" dirty="0" err="1"/>
-              <a:t>keypoints</a:t>
-            </a:r>
-            <a:r>
-              <a:rPr lang="en-IN" sz="2800" dirty="0"/>
-              <a:t>.</a:t>
+            <a:pPr algn="ctr"/>
+            <a:r>
+              <a:rPr lang="en-US" sz="7200" b="1" cap="none" spc="0" dirty="0">
+                <a:ln w="12700">
+                  <a:solidFill>
+                    <a:schemeClr val="accent1"/>
+                  </a:solidFill>
+                  <a:prstDash val="solid"/>
+                </a:ln>
+                <a:pattFill prst="pct50">
+                  <a:fgClr>
+                    <a:schemeClr val="accent1"/>
+                  </a:fgClr>
+                  <a:bgClr>
+                    <a:schemeClr val="accent1">
+                      <a:lumMod val="20000"/>
+                      <a:lumOff val="80000"/>
+                    </a:schemeClr>
+                  </a:bgClr>
+                </a:pattFill>
+                <a:effectLst>
+                  <a:outerShdw dist="38100" dir="2640000" algn="bl" rotWithShape="0">
+                    <a:schemeClr val="accent1"/>
+                  </a:outerShdw>
+                </a:effectLst>
+              </a:rPr>
+              <a:t>Thank You</a:t>
             </a:r>
           </a:p>
         </p:txBody>
@@ -4250,140 +4254,7 @@
     </p:spTree>
     <p:extLst>
       <p:ext uri="{BB962C8B-B14F-4D97-AF65-F5344CB8AC3E}">
-        <p14:creationId xmlns:p14="http://schemas.microsoft.com/office/powerpoint/2010/main" val="362589072"/>
-      </p:ext>
-    </p:extLst>
-  </p:cSld>
-  <p:clrMapOvr>
-    <a:masterClrMapping/>
-  </p:clrMapOvr>
-</p:sld>
-</file>
-
-<file path=ppt/slides/slide12.xml><?xml version="1.0" encoding="utf-8"?>
-<p:sld xmlns:a="http://schemas.openxmlformats.org/drawingml/2006/main" xmlns:r="http://schemas.openxmlformats.org/officeDocument/2006/relationships" xmlns:p="http://schemas.openxmlformats.org/presentationml/2006/main">
-  <p:cSld>
-    <p:spTree>
-      <p:nvGrpSpPr>
-        <p:cNvPr id="1" name=""/>
-        <p:cNvGrpSpPr/>
-        <p:nvPr/>
-      </p:nvGrpSpPr>
-      <p:grpSpPr>
-        <a:xfrm>
-          <a:off x="0" y="0"/>
-          <a:ext cx="0" cy="0"/>
-          <a:chOff x="0" y="0"/>
-          <a:chExt cx="0" cy="0"/>
-        </a:xfrm>
-      </p:grpSpPr>
-      <p:sp>
-        <p:nvSpPr>
-          <p:cNvPr id="2" name="Title 1">
-            <a:extLst>
-              <a:ext uri="{FF2B5EF4-FFF2-40B4-BE49-F238E27FC236}">
-                <a16:creationId xmlns:a16="http://schemas.microsoft.com/office/drawing/2014/main" id="{8D0AD91D-BD8B-5A8C-D74E-DE3C472785AC}"/>
-              </a:ext>
-            </a:extLst>
-          </p:cNvPr>
-          <p:cNvSpPr>
-            <a:spLocks noGrp="1"/>
-          </p:cNvSpPr>
-          <p:nvPr>
-            <p:ph type="title"/>
-          </p:nvPr>
-        </p:nvSpPr>
-        <p:spPr/>
-        <p:txBody>
-          <a:bodyPr>
-            <a:normAutofit/>
-          </a:bodyPr>
-          <a:lstStyle/>
-          <a:p>
-            <a:r>
-              <a:rPr lang="en-US" sz="5400" dirty="0"/>
-              <a:t>Ethical Concerns &amp; Mitigations</a:t>
-            </a:r>
-            <a:endParaRPr lang="en-IN" sz="5400" dirty="0"/>
-          </a:p>
-        </p:txBody>
-      </p:sp>
-      <p:sp>
-        <p:nvSpPr>
-          <p:cNvPr id="3" name="Content Placeholder 2">
-            <a:extLst>
-              <a:ext uri="{FF2B5EF4-FFF2-40B4-BE49-F238E27FC236}">
-                <a16:creationId xmlns:a16="http://schemas.microsoft.com/office/drawing/2014/main" id="{22C0E202-246B-95BD-60C5-E2AEAECCCB57}"/>
-              </a:ext>
-            </a:extLst>
-          </p:cNvPr>
-          <p:cNvSpPr>
-            <a:spLocks noGrp="1"/>
-          </p:cNvSpPr>
-          <p:nvPr>
-            <p:ph idx="1"/>
-          </p:nvPr>
-        </p:nvSpPr>
-        <p:spPr/>
-        <p:txBody>
-          <a:bodyPr>
-            <a:normAutofit/>
-          </a:bodyPr>
-          <a:lstStyle/>
-          <a:p>
-            <a:pPr>
-              <a:buFont typeface="Arial" panose="020B0604020202020204" pitchFamily="34" charset="0"/>
-              <a:buChar char="•"/>
-            </a:pPr>
-            <a:r>
-              <a:rPr lang="en-IN" sz="2400" dirty="0"/>
-              <a:t>Consent: explicit consent for any recordings and dataset use.</a:t>
-            </a:r>
-          </a:p>
-          <a:p>
-            <a:pPr>
-              <a:buFont typeface="Arial" panose="020B0604020202020204" pitchFamily="34" charset="0"/>
-              <a:buChar char="•"/>
-            </a:pPr>
-            <a:r>
-              <a:rPr lang="en-IN" sz="2400" dirty="0"/>
-              <a:t>Privacy: default to local </a:t>
-            </a:r>
-            <a:r>
-              <a:rPr lang="en-IN" sz="2400" dirty="0" err="1"/>
-              <a:t>keypoint</a:t>
-            </a:r>
-            <a:r>
-              <a:rPr lang="en-IN" sz="2400" dirty="0"/>
-              <a:t> extraction; do not store raw video; delete anonymized data after use.</a:t>
-            </a:r>
-          </a:p>
-          <a:p>
-            <a:pPr>
-              <a:buFont typeface="Arial" panose="020B0604020202020204" pitchFamily="34" charset="0"/>
-              <a:buChar char="•"/>
-            </a:pPr>
-            <a:r>
-              <a:rPr lang="en-IN" sz="2400" dirty="0"/>
-              <a:t>Transparency: clear disclaimer — “prototype, limited-vocab, not clinical/diagnostic.”</a:t>
-            </a:r>
-          </a:p>
-          <a:p>
-            <a:pPr>
-              <a:buFont typeface="Arial" panose="020B0604020202020204" pitchFamily="34" charset="0"/>
-              <a:buChar char="•"/>
-            </a:pPr>
-            <a:r>
-              <a:rPr lang="en-IN" sz="2400" dirty="0"/>
-              <a:t>Bias: acknowledge signer diversity—collect varied signer samples when possible.</a:t>
-            </a:r>
-          </a:p>
-        </p:txBody>
-      </p:sp>
-    </p:spTree>
-    <p:extLst>
-      <p:ext uri="{BB962C8B-B14F-4D97-AF65-F5344CB8AC3E}">
-        <p14:creationId xmlns:p14="http://schemas.microsoft.com/office/powerpoint/2010/main" val="2579856468"/>
+        <p14:creationId xmlns:p14="http://schemas.microsoft.com/office/powerpoint/2010/main" val="268462265"/>
       </p:ext>
     </p:extLst>
   </p:cSld>
@@ -4655,7 +4526,7 @@
           <p:cNvPr id="2" name="Title 1">
             <a:extLst>
               <a:ext uri="{FF2B5EF4-FFF2-40B4-BE49-F238E27FC236}">
-                <a16:creationId xmlns:a16="http://schemas.microsoft.com/office/drawing/2014/main" id="{E2DE6F25-CC93-278F-1446-BA433F17924F}"/>
+                <a16:creationId xmlns:a16="http://schemas.microsoft.com/office/drawing/2014/main" id="{99B4D7DA-8694-F34C-9602-E1EB3B29CA1B}"/>
               </a:ext>
             </a:extLst>
           </p:cNvPr>
@@ -4675,7 +4546,7 @@
           <a:p>
             <a:r>
               <a:rPr lang="en-US" sz="6600" dirty="0"/>
-              <a:t>Proposed Solution</a:t>
+              <a:t>Target Users</a:t>
             </a:r>
             <a:endParaRPr lang="en-IN" sz="6600" dirty="0"/>
           </a:p>
@@ -4686,7 +4557,7 @@
           <p:cNvPr id="3" name="Content Placeholder 2">
             <a:extLst>
               <a:ext uri="{FF2B5EF4-FFF2-40B4-BE49-F238E27FC236}">
-                <a16:creationId xmlns:a16="http://schemas.microsoft.com/office/drawing/2014/main" id="{DAC4D6B8-F75E-6D7D-7432-3080E2AEC789}"/>
+                <a16:creationId xmlns:a16="http://schemas.microsoft.com/office/drawing/2014/main" id="{AA5D1178-50D6-AA9E-9F6B-C38C7FEDCE0B}"/>
               </a:ext>
             </a:extLst>
           </p:cNvPr>
@@ -4704,74 +4575,42 @@
           </a:bodyPr>
           <a:lstStyle/>
           <a:p>
-            <a:r>
-              <a:rPr lang="en-IN" sz="2400" dirty="0"/>
-              <a:t>Client-first pipeline: </a:t>
-            </a:r>
-          </a:p>
-          <a:p>
-            <a:pPr lvl="1"/>
-            <a:r>
-              <a:rPr lang="en-IN" sz="2000" dirty="0"/>
-              <a:t>Webcam → </a:t>
-            </a:r>
-            <a:r>
-              <a:rPr lang="en-IN" sz="2000" dirty="0" err="1"/>
-              <a:t>MediaPipe</a:t>
-            </a:r>
-            <a:r>
-              <a:rPr lang="en-IN" sz="2000" dirty="0"/>
-              <a:t> </a:t>
-            </a:r>
-            <a:r>
-              <a:rPr lang="en-IN" sz="2000" dirty="0" err="1"/>
-              <a:t>keypoint</a:t>
-            </a:r>
-            <a:r>
-              <a:rPr lang="en-IN" sz="2000" dirty="0"/>
-              <a:t> → Lightweight temporal model → Templated notes.</a:t>
-            </a:r>
-          </a:p>
-          <a:p>
-            <a:r>
-              <a:rPr lang="en-IN" sz="2400" dirty="0"/>
-              <a:t>Privacy measures: </a:t>
-            </a:r>
-          </a:p>
-          <a:p>
-            <a:pPr lvl="1"/>
-            <a:r>
-              <a:rPr lang="en-IN" sz="2000" dirty="0"/>
-              <a:t>Local </a:t>
-            </a:r>
-            <a:r>
-              <a:rPr lang="en-IN" sz="2000" dirty="0" err="1"/>
-              <a:t>keypoint</a:t>
-            </a:r>
-            <a:r>
-              <a:rPr lang="en-IN" sz="2000" dirty="0"/>
-              <a:t> extraction; no raw video storage.</a:t>
-            </a:r>
-          </a:p>
-          <a:p>
-            <a:r>
-              <a:rPr lang="en-IN" sz="2400" dirty="0"/>
-              <a:t>Fallback: </a:t>
-            </a:r>
-          </a:p>
-          <a:p>
-            <a:pPr lvl="1"/>
-            <a:r>
-              <a:rPr lang="en-IN" sz="2000" dirty="0"/>
-              <a:t>Prerecorded video processing for robust demos.</a:t>
-            </a:r>
+            <a:pPr>
+              <a:buFont typeface="Arial" panose="020B0604020202020204" pitchFamily="34" charset="0"/>
+              <a:buChar char="•"/>
+            </a:pPr>
+            <a:r>
+              <a:rPr lang="en-US" sz="2400" dirty="0"/>
+              <a:t>Primary: Students with hearing impairment.</a:t>
+            </a:r>
+          </a:p>
+          <a:p>
+            <a:pPr>
+              <a:buFont typeface="Arial" panose="020B0604020202020204" pitchFamily="34" charset="0"/>
+              <a:buChar char="•"/>
+            </a:pPr>
+            <a:r>
+              <a:rPr lang="en-US" sz="2400" dirty="0"/>
+              <a:t>Secondary: Learning platforms (accessibility add-on).</a:t>
+            </a:r>
+          </a:p>
+          <a:p>
+            <a:pPr>
+              <a:buFont typeface="Arial" panose="020B0604020202020204" pitchFamily="34" charset="0"/>
+              <a:buChar char="•"/>
+            </a:pPr>
+            <a:r>
+              <a:rPr lang="en-US" sz="2400" dirty="0"/>
+              <a:t>Deployment contexts: small classroom, blended online class, recorded lecture review.</a:t>
+            </a:r>
+            <a:endParaRPr lang="en-IN" sz="2400" dirty="0"/>
           </a:p>
         </p:txBody>
       </p:sp>
     </p:spTree>
     <p:extLst>
       <p:ext uri="{BB962C8B-B14F-4D97-AF65-F5344CB8AC3E}">
-        <p14:creationId xmlns:p14="http://schemas.microsoft.com/office/powerpoint/2010/main" val="147480582"/>
+        <p14:creationId xmlns:p14="http://schemas.microsoft.com/office/powerpoint/2010/main" val="2055806058"/>
       </p:ext>
     </p:extLst>
   </p:cSld>
@@ -4803,234 +4642,6 @@
           <p:cNvPr id="2" name="Title 1">
             <a:extLst>
               <a:ext uri="{FF2B5EF4-FFF2-40B4-BE49-F238E27FC236}">
-                <a16:creationId xmlns:a16="http://schemas.microsoft.com/office/drawing/2014/main" id="{012E11BF-DA36-DB44-00AC-A0AD1BEA74D6}"/>
-              </a:ext>
-            </a:extLst>
-          </p:cNvPr>
-          <p:cNvSpPr>
-            <a:spLocks noGrp="1"/>
-          </p:cNvSpPr>
-          <p:nvPr>
-            <p:ph type="title"/>
-          </p:nvPr>
-        </p:nvSpPr>
-        <p:spPr/>
-        <p:txBody>
-          <a:bodyPr>
-            <a:normAutofit/>
-          </a:bodyPr>
-          <a:lstStyle/>
-          <a:p>
-            <a:r>
-              <a:rPr lang="en-US" sz="5400" dirty="0"/>
-              <a:t>SDG Alignment</a:t>
-            </a:r>
-            <a:endParaRPr lang="en-IN" sz="5400" dirty="0"/>
-          </a:p>
-        </p:txBody>
-      </p:sp>
-      <p:sp>
-        <p:nvSpPr>
-          <p:cNvPr id="3" name="Content Placeholder 2">
-            <a:extLst>
-              <a:ext uri="{FF2B5EF4-FFF2-40B4-BE49-F238E27FC236}">
-                <a16:creationId xmlns:a16="http://schemas.microsoft.com/office/drawing/2014/main" id="{70517F4A-B8C7-4E72-5D33-8CC3E67011B8}"/>
-              </a:ext>
-            </a:extLst>
-          </p:cNvPr>
-          <p:cNvSpPr>
-            <a:spLocks noGrp="1"/>
-          </p:cNvSpPr>
-          <p:nvPr>
-            <p:ph idx="1"/>
-          </p:nvPr>
-        </p:nvSpPr>
-        <p:spPr/>
-        <p:txBody>
-          <a:bodyPr>
-            <a:normAutofit/>
-          </a:bodyPr>
-          <a:lstStyle/>
-          <a:p>
-            <a:r>
-              <a:rPr lang="en-US" sz="3200" dirty="0"/>
-              <a:t>SDG 4 - Quality Education: </a:t>
-            </a:r>
-          </a:p>
-          <a:p>
-            <a:pPr lvl="1"/>
-            <a:r>
-              <a:rPr lang="en-US" sz="2800" dirty="0"/>
-              <a:t>Improve access &amp; participation for learners with hearing loss.</a:t>
-            </a:r>
-          </a:p>
-          <a:p>
-            <a:r>
-              <a:rPr lang="en-US" sz="3200" dirty="0"/>
-              <a:t>SDG 10 - Reduced Inequalities: </a:t>
-            </a:r>
-          </a:p>
-          <a:p>
-            <a:pPr lvl="1"/>
-            <a:r>
-              <a:rPr lang="en-US" sz="2800" dirty="0"/>
-              <a:t>Lowers accessibility barriers in mainstream education.</a:t>
-            </a:r>
-            <a:endParaRPr lang="en-IN" sz="2800" dirty="0"/>
-          </a:p>
-        </p:txBody>
-      </p:sp>
-    </p:spTree>
-    <p:extLst>
-      <p:ext uri="{BB962C8B-B14F-4D97-AF65-F5344CB8AC3E}">
-        <p14:creationId xmlns:p14="http://schemas.microsoft.com/office/powerpoint/2010/main" val="175557037"/>
-      </p:ext>
-    </p:extLst>
-  </p:cSld>
-  <p:clrMapOvr>
-    <a:masterClrMapping/>
-  </p:clrMapOvr>
-</p:sld>
-</file>
-
-<file path=ppt/slides/slide6.xml><?xml version="1.0" encoding="utf-8"?>
-<p:sld xmlns:a="http://schemas.openxmlformats.org/drawingml/2006/main" xmlns:r="http://schemas.openxmlformats.org/officeDocument/2006/relationships" xmlns:p="http://schemas.openxmlformats.org/presentationml/2006/main">
-  <p:cSld>
-    <p:spTree>
-      <p:nvGrpSpPr>
-        <p:cNvPr id="1" name=""/>
-        <p:cNvGrpSpPr/>
-        <p:nvPr/>
-      </p:nvGrpSpPr>
-      <p:grpSpPr>
-        <a:xfrm>
-          <a:off x="0" y="0"/>
-          <a:ext cx="0" cy="0"/>
-          <a:chOff x="0" y="0"/>
-          <a:chExt cx="0" cy="0"/>
-        </a:xfrm>
-      </p:grpSpPr>
-      <p:sp>
-        <p:nvSpPr>
-          <p:cNvPr id="2" name="Title 1">
-            <a:extLst>
-              <a:ext uri="{FF2B5EF4-FFF2-40B4-BE49-F238E27FC236}">
-                <a16:creationId xmlns:a16="http://schemas.microsoft.com/office/drawing/2014/main" id="{99B4D7DA-8694-F34C-9602-E1EB3B29CA1B}"/>
-              </a:ext>
-            </a:extLst>
-          </p:cNvPr>
-          <p:cNvSpPr>
-            <a:spLocks noGrp="1"/>
-          </p:cNvSpPr>
-          <p:nvPr>
-            <p:ph type="title"/>
-          </p:nvPr>
-        </p:nvSpPr>
-        <p:spPr/>
-        <p:txBody>
-          <a:bodyPr>
-            <a:normAutofit/>
-          </a:bodyPr>
-          <a:lstStyle/>
-          <a:p>
-            <a:r>
-              <a:rPr lang="en-US" sz="6600" dirty="0"/>
-              <a:t>Target Users</a:t>
-            </a:r>
-            <a:endParaRPr lang="en-IN" sz="6600" dirty="0"/>
-          </a:p>
-        </p:txBody>
-      </p:sp>
-      <p:sp>
-        <p:nvSpPr>
-          <p:cNvPr id="3" name="Content Placeholder 2">
-            <a:extLst>
-              <a:ext uri="{FF2B5EF4-FFF2-40B4-BE49-F238E27FC236}">
-                <a16:creationId xmlns:a16="http://schemas.microsoft.com/office/drawing/2014/main" id="{AA5D1178-50D6-AA9E-9F6B-C38C7FEDCE0B}"/>
-              </a:ext>
-            </a:extLst>
-          </p:cNvPr>
-          <p:cNvSpPr>
-            <a:spLocks noGrp="1"/>
-          </p:cNvSpPr>
-          <p:nvPr>
-            <p:ph idx="1"/>
-          </p:nvPr>
-        </p:nvSpPr>
-        <p:spPr/>
-        <p:txBody>
-          <a:bodyPr>
-            <a:normAutofit/>
-          </a:bodyPr>
-          <a:lstStyle/>
-          <a:p>
-            <a:pPr>
-              <a:buFont typeface="Arial" panose="020B0604020202020204" pitchFamily="34" charset="0"/>
-              <a:buChar char="•"/>
-            </a:pPr>
-            <a:r>
-              <a:rPr lang="en-US" sz="2400" dirty="0"/>
-              <a:t>Primary: Students with hearing impairment.</a:t>
-            </a:r>
-          </a:p>
-          <a:p>
-            <a:pPr>
-              <a:buFont typeface="Arial" panose="020B0604020202020204" pitchFamily="34" charset="0"/>
-              <a:buChar char="•"/>
-            </a:pPr>
-            <a:r>
-              <a:rPr lang="en-US" sz="2400" dirty="0"/>
-              <a:t>Secondary: Learning platforms (accessibility add-on).</a:t>
-            </a:r>
-          </a:p>
-          <a:p>
-            <a:pPr>
-              <a:buFont typeface="Arial" panose="020B0604020202020204" pitchFamily="34" charset="0"/>
-              <a:buChar char="•"/>
-            </a:pPr>
-            <a:r>
-              <a:rPr lang="en-US" sz="2400" dirty="0"/>
-              <a:t>Deployment contexts: small classroom, blended online class, recorded lecture review.</a:t>
-            </a:r>
-            <a:endParaRPr lang="en-IN" sz="2400" dirty="0"/>
-          </a:p>
-        </p:txBody>
-      </p:sp>
-    </p:spTree>
-    <p:extLst>
-      <p:ext uri="{BB962C8B-B14F-4D97-AF65-F5344CB8AC3E}">
-        <p14:creationId xmlns:p14="http://schemas.microsoft.com/office/powerpoint/2010/main" val="2055806058"/>
-      </p:ext>
-    </p:extLst>
-  </p:cSld>
-  <p:clrMapOvr>
-    <a:masterClrMapping/>
-  </p:clrMapOvr>
-</p:sld>
-</file>
-
-<file path=ppt/slides/slide7.xml><?xml version="1.0" encoding="utf-8"?>
-<p:sld xmlns:a="http://schemas.openxmlformats.org/drawingml/2006/main" xmlns:r="http://schemas.openxmlformats.org/officeDocument/2006/relationships" xmlns:p="http://schemas.openxmlformats.org/presentationml/2006/main">
-  <p:cSld>
-    <p:spTree>
-      <p:nvGrpSpPr>
-        <p:cNvPr id="1" name=""/>
-        <p:cNvGrpSpPr/>
-        <p:nvPr/>
-      </p:nvGrpSpPr>
-      <p:grpSpPr>
-        <a:xfrm>
-          <a:off x="0" y="0"/>
-          <a:ext cx="0" cy="0"/>
-          <a:chOff x="0" y="0"/>
-          <a:chExt cx="0" cy="0"/>
-        </a:xfrm>
-      </p:grpSpPr>
-      <p:sp>
-        <p:nvSpPr>
-          <p:cNvPr id="2" name="Title 1">
-            <a:extLst>
-              <a:ext uri="{FF2B5EF4-FFF2-40B4-BE49-F238E27FC236}">
                 <a16:creationId xmlns:a16="http://schemas.microsoft.com/office/drawing/2014/main" id="{306D8CBA-E62E-05B4-DC17-59B148B5C73A}"/>
               </a:ext>
             </a:extLst>
@@ -5124,7 +4735,7 @@
 </p:sld>
 </file>
 
-<file path=ppt/slides/slide8.xml><?xml version="1.0" encoding="utf-8"?>
+<file path=ppt/slides/slide6.xml><?xml version="1.0" encoding="utf-8"?>
 <p:sld xmlns:a="http://schemas.openxmlformats.org/drawingml/2006/main" xmlns:r="http://schemas.openxmlformats.org/officeDocument/2006/relationships" xmlns:p="http://schemas.openxmlformats.org/presentationml/2006/main">
   <p:cSld>
     <p:spTree>
@@ -5227,7 +4838,7 @@
 </p:sld>
 </file>
 
-<file path=ppt/slides/slide9.xml><?xml version="1.0" encoding="utf-8"?>
+<file path=ppt/slides/slide7.xml><?xml version="1.0" encoding="utf-8"?>
 <p:sld xmlns:a="http://schemas.openxmlformats.org/drawingml/2006/main" xmlns:r="http://schemas.openxmlformats.org/officeDocument/2006/relationships" xmlns:p="http://schemas.openxmlformats.org/presentationml/2006/main">
   <p:cSld>
     <p:spTree>
@@ -5394,7 +5005,7 @@
         <p:spPr>
           <a:xfrm>
             <a:off x="3838903" y="3752193"/>
-            <a:ext cx="1198180" cy="461665"/>
+            <a:ext cx="1198180" cy="400110"/>
           </a:xfrm>
           <a:prstGeom prst="rect">
             <a:avLst/>
@@ -5408,10 +5019,10 @@
           <a:lstStyle/>
           <a:p>
             <a:r>
-              <a:rPr lang="en-US" sz="2400" dirty="0"/>
-              <a:t>Llama2</a:t>
-            </a:r>
-            <a:endParaRPr lang="en-IN" sz="2400" dirty="0"/>
+              <a:rPr lang="en-US" sz="2000" dirty="0"/>
+              <a:t>Llama3.2</a:t>
+            </a:r>
+            <a:endParaRPr lang="en-IN" sz="2000" dirty="0"/>
           </a:p>
         </p:txBody>
       </p:sp>
@@ -5491,6 +5102,265 @@
     <p:extLst>
       <p:ext uri="{BB962C8B-B14F-4D97-AF65-F5344CB8AC3E}">
         <p14:creationId xmlns:p14="http://schemas.microsoft.com/office/powerpoint/2010/main" val="1492836798"/>
+      </p:ext>
+    </p:extLst>
+  </p:cSld>
+  <p:clrMapOvr>
+    <a:masterClrMapping/>
+  </p:clrMapOvr>
+</p:sld>
+</file>
+
+<file path=ppt/slides/slide8.xml><?xml version="1.0" encoding="utf-8"?>
+<p:sld xmlns:a="http://schemas.openxmlformats.org/drawingml/2006/main" xmlns:r="http://schemas.openxmlformats.org/officeDocument/2006/relationships" xmlns:p="http://schemas.openxmlformats.org/presentationml/2006/main">
+  <p:cSld>
+    <p:spTree>
+      <p:nvGrpSpPr>
+        <p:cNvPr id="1" name=""/>
+        <p:cNvGrpSpPr/>
+        <p:nvPr/>
+      </p:nvGrpSpPr>
+      <p:grpSpPr>
+        <a:xfrm>
+          <a:off x="0" y="0"/>
+          <a:ext cx="0" cy="0"/>
+          <a:chOff x="0" y="0"/>
+          <a:chExt cx="0" cy="0"/>
+        </a:xfrm>
+      </p:grpSpPr>
+      <p:pic>
+        <p:nvPicPr>
+          <p:cNvPr id="5" name="Picture 4">
+            <a:extLst>
+              <a:ext uri="{FF2B5EF4-FFF2-40B4-BE49-F238E27FC236}">
+                <a16:creationId xmlns:a16="http://schemas.microsoft.com/office/drawing/2014/main" id="{F34DBFB4-32AC-956C-810E-5A78524741E5}"/>
+              </a:ext>
+            </a:extLst>
+          </p:cNvPr>
+          <p:cNvPicPr>
+            <a:picLocks noChangeAspect="1"/>
+          </p:cNvPicPr>
+          <p:nvPr/>
+        </p:nvPicPr>
+        <p:blipFill>
+          <a:blip r:embed="rId2">
+            <a:extLst>
+              <a:ext uri="{28A0092B-C50C-407E-A947-70E740481C1C}">
+                <a14:useLocalDpi xmlns:a14="http://schemas.microsoft.com/office/drawing/2010/main" val="0"/>
+              </a:ext>
+            </a:extLst>
+          </a:blip>
+          <a:stretch>
+            <a:fillRect/>
+          </a:stretch>
+        </p:blipFill>
+        <p:spPr>
+          <a:xfrm>
+            <a:off x="6211202" y="0"/>
+            <a:ext cx="3915515" cy="2650849"/>
+          </a:xfrm>
+          <a:prstGeom prst="rect">
+            <a:avLst/>
+          </a:prstGeom>
+        </p:spPr>
+      </p:pic>
+      <p:pic>
+        <p:nvPicPr>
+          <p:cNvPr id="7" name="Picture 6">
+            <a:extLst>
+              <a:ext uri="{FF2B5EF4-FFF2-40B4-BE49-F238E27FC236}">
+                <a16:creationId xmlns:a16="http://schemas.microsoft.com/office/drawing/2014/main" id="{82618F34-B11B-D119-9D74-36B4FA42C82D}"/>
+              </a:ext>
+            </a:extLst>
+          </p:cNvPr>
+          <p:cNvPicPr>
+            <a:picLocks noChangeAspect="1"/>
+          </p:cNvPicPr>
+          <p:nvPr/>
+        </p:nvPicPr>
+        <p:blipFill>
+          <a:blip r:embed="rId3">
+            <a:extLst>
+              <a:ext uri="{28A0092B-C50C-407E-A947-70E740481C1C}">
+                <a14:useLocalDpi xmlns:a14="http://schemas.microsoft.com/office/drawing/2010/main" val="0"/>
+              </a:ext>
+            </a:extLst>
+          </a:blip>
+          <a:stretch>
+            <a:fillRect/>
+          </a:stretch>
+        </p:blipFill>
+        <p:spPr>
+          <a:xfrm>
+            <a:off x="1529256" y="0"/>
+            <a:ext cx="3261906" cy="2650849"/>
+          </a:xfrm>
+          <a:prstGeom prst="rect">
+            <a:avLst/>
+          </a:prstGeom>
+        </p:spPr>
+      </p:pic>
+      <p:pic>
+        <p:nvPicPr>
+          <p:cNvPr id="9" name="Picture 8">
+            <a:extLst>
+              <a:ext uri="{FF2B5EF4-FFF2-40B4-BE49-F238E27FC236}">
+                <a16:creationId xmlns:a16="http://schemas.microsoft.com/office/drawing/2014/main" id="{94EC80A6-1EBA-0346-4439-45159FBC06BB}"/>
+              </a:ext>
+            </a:extLst>
+          </p:cNvPr>
+          <p:cNvPicPr>
+            <a:picLocks noChangeAspect="1"/>
+          </p:cNvPicPr>
+          <p:nvPr/>
+        </p:nvPicPr>
+        <p:blipFill>
+          <a:blip r:embed="rId4">
+            <a:extLst>
+              <a:ext uri="{28A0092B-C50C-407E-A947-70E740481C1C}">
+                <a14:useLocalDpi xmlns:a14="http://schemas.microsoft.com/office/drawing/2010/main" val="0"/>
+              </a:ext>
+            </a:extLst>
+          </a:blip>
+          <a:stretch>
+            <a:fillRect/>
+          </a:stretch>
+        </p:blipFill>
+        <p:spPr>
+          <a:xfrm>
+            <a:off x="1765739" y="2631202"/>
+            <a:ext cx="7717220" cy="4226798"/>
+          </a:xfrm>
+          <a:prstGeom prst="rect">
+            <a:avLst/>
+          </a:prstGeom>
+        </p:spPr>
+      </p:pic>
+    </p:spTree>
+    <p:extLst>
+      <p:ext uri="{BB962C8B-B14F-4D97-AF65-F5344CB8AC3E}">
+        <p14:creationId xmlns:p14="http://schemas.microsoft.com/office/powerpoint/2010/main" val="3612753817"/>
+      </p:ext>
+    </p:extLst>
+  </p:cSld>
+  <p:clrMapOvr>
+    <a:masterClrMapping/>
+  </p:clrMapOvr>
+</p:sld>
+</file>
+
+<file path=ppt/slides/slide9.xml><?xml version="1.0" encoding="utf-8"?>
+<p:sld xmlns:a="http://schemas.openxmlformats.org/drawingml/2006/main" xmlns:r="http://schemas.openxmlformats.org/officeDocument/2006/relationships" xmlns:p="http://schemas.openxmlformats.org/presentationml/2006/main">
+  <p:cSld>
+    <p:spTree>
+      <p:nvGrpSpPr>
+        <p:cNvPr id="1" name=""/>
+        <p:cNvGrpSpPr/>
+        <p:nvPr/>
+      </p:nvGrpSpPr>
+      <p:grpSpPr>
+        <a:xfrm>
+          <a:off x="0" y="0"/>
+          <a:ext cx="0" cy="0"/>
+          <a:chOff x="0" y="0"/>
+          <a:chExt cx="0" cy="0"/>
+        </a:xfrm>
+      </p:grpSpPr>
+      <p:sp>
+        <p:nvSpPr>
+          <p:cNvPr id="2" name="Title 1">
+            <a:extLst>
+              <a:ext uri="{FF2B5EF4-FFF2-40B4-BE49-F238E27FC236}">
+                <a16:creationId xmlns:a16="http://schemas.microsoft.com/office/drawing/2014/main" id="{2D568E15-6E84-C9D0-0A46-5EF0A2C5F75A}"/>
+              </a:ext>
+            </a:extLst>
+          </p:cNvPr>
+          <p:cNvSpPr>
+            <a:spLocks noGrp="1"/>
+          </p:cNvSpPr>
+          <p:nvPr>
+            <p:ph type="title"/>
+          </p:nvPr>
+        </p:nvSpPr>
+        <p:spPr/>
+        <p:txBody>
+          <a:bodyPr>
+            <a:normAutofit/>
+          </a:bodyPr>
+          <a:lstStyle/>
+          <a:p>
+            <a:r>
+              <a:rPr lang="en-IN" sz="6000" dirty="0"/>
+              <a:t>Business Model</a:t>
+            </a:r>
+          </a:p>
+        </p:txBody>
+      </p:sp>
+      <p:sp>
+        <p:nvSpPr>
+          <p:cNvPr id="3" name="Content Placeholder 2">
+            <a:extLst>
+              <a:ext uri="{FF2B5EF4-FFF2-40B4-BE49-F238E27FC236}">
+                <a16:creationId xmlns:a16="http://schemas.microsoft.com/office/drawing/2014/main" id="{FFCCEE95-94DF-9AE7-702D-6C4DBE179BF3}"/>
+              </a:ext>
+            </a:extLst>
+          </p:cNvPr>
+          <p:cNvSpPr>
+            <a:spLocks noGrp="1"/>
+          </p:cNvSpPr>
+          <p:nvPr>
+            <p:ph idx="1"/>
+          </p:nvPr>
+        </p:nvSpPr>
+        <p:spPr/>
+        <p:txBody>
+          <a:bodyPr>
+            <a:normAutofit/>
+          </a:bodyPr>
+          <a:lstStyle/>
+          <a:p>
+            <a:pPr>
+              <a:buFont typeface="Wingdings" panose="05000000000000000000" pitchFamily="2" charset="2"/>
+              <a:buChar char="v"/>
+            </a:pPr>
+            <a:endParaRPr lang="en-IN" sz="2800" dirty="0"/>
+          </a:p>
+          <a:p>
+            <a:pPr>
+              <a:buFont typeface="Wingdings" panose="05000000000000000000" pitchFamily="2" charset="2"/>
+              <a:buChar char="v"/>
+            </a:pPr>
+            <a:r>
+              <a:rPr lang="en-IN" sz="2800" dirty="0"/>
+              <a:t>B2B licensing to institutions</a:t>
+            </a:r>
+          </a:p>
+          <a:p>
+            <a:pPr>
+              <a:buFont typeface="Wingdings" panose="05000000000000000000" pitchFamily="2" charset="2"/>
+              <a:buChar char="v"/>
+            </a:pPr>
+            <a:r>
+              <a:rPr lang="en-IN" sz="2800" dirty="0"/>
+              <a:t>Subscription model for schools/colleges</a:t>
+            </a:r>
+          </a:p>
+          <a:p>
+            <a:pPr>
+              <a:buFont typeface="Wingdings" panose="05000000000000000000" pitchFamily="2" charset="2"/>
+              <a:buChar char="v"/>
+            </a:pPr>
+            <a:r>
+              <a:rPr lang="en-IN" sz="2800" dirty="0"/>
+              <a:t>EdTech Platform Integration free</a:t>
+            </a:r>
+          </a:p>
+        </p:txBody>
+      </p:sp>
+    </p:spTree>
+    <p:extLst>
+      <p:ext uri="{BB962C8B-B14F-4D97-AF65-F5344CB8AC3E}">
+        <p14:creationId xmlns:p14="http://schemas.microsoft.com/office/powerpoint/2010/main" val="3691024236"/>
       </p:ext>
     </p:extLst>
   </p:cSld>

--- a/Sign2Notes.pptx
+++ b/Sign2Notes.pptx
@@ -9,13 +9,17 @@
     <p:sldId id="257" r:id="rId3"/>
     <p:sldId id="258" r:id="rId4"/>
     <p:sldId id="261" r:id="rId5"/>
-    <p:sldId id="262" r:id="rId6"/>
-    <p:sldId id="267" r:id="rId7"/>
-    <p:sldId id="266" r:id="rId8"/>
-    <p:sldId id="268" r:id="rId9"/>
-    <p:sldId id="269" r:id="rId10"/>
-    <p:sldId id="265" r:id="rId11"/>
-    <p:sldId id="270" r:id="rId12"/>
+    <p:sldId id="267" r:id="rId6"/>
+    <p:sldId id="266" r:id="rId7"/>
+    <p:sldId id="271" r:id="rId8"/>
+    <p:sldId id="272" r:id="rId9"/>
+    <p:sldId id="268" r:id="rId10"/>
+    <p:sldId id="273" r:id="rId11"/>
+    <p:sldId id="274" r:id="rId12"/>
+    <p:sldId id="275" r:id="rId13"/>
+    <p:sldId id="269" r:id="rId14"/>
+    <p:sldId id="265" r:id="rId15"/>
+    <p:sldId id="270" r:id="rId16"/>
   </p:sldIdLst>
   <p:sldSz cx="12192000" cy="6858000"/>
   <p:notesSz cx="6858000" cy="9144000"/>
@@ -348,7 +352,7 @@
           <a:p>
             <a:fld id="{3E387D70-1183-4AF0-B0A1-0C462F4564CD}" type="datetimeFigureOut">
               <a:rPr lang="en-IN" smtClean="0"/>
-              <a:t>13-02-2026</a:t>
+              <a:t>09-04-2026</a:t>
             </a:fld>
             <a:endParaRPr lang="en-IN"/>
           </a:p>
@@ -556,7 +560,7 @@
           <a:p>
             <a:fld id="{3E387D70-1183-4AF0-B0A1-0C462F4564CD}" type="datetimeFigureOut">
               <a:rPr lang="en-IN" smtClean="0"/>
-              <a:t>13-02-2026</a:t>
+              <a:t>09-04-2026</a:t>
             </a:fld>
             <a:endParaRPr lang="en-IN"/>
           </a:p>
@@ -812,7 +816,7 @@
           <a:p>
             <a:fld id="{3E387D70-1183-4AF0-B0A1-0C462F4564CD}" type="datetimeFigureOut">
               <a:rPr lang="en-IN" smtClean="0"/>
-              <a:t>13-02-2026</a:t>
+              <a:t>09-04-2026</a:t>
             </a:fld>
             <a:endParaRPr lang="en-IN"/>
           </a:p>
@@ -986,7 +990,7 @@
           <a:p>
             <a:fld id="{3E387D70-1183-4AF0-B0A1-0C462F4564CD}" type="datetimeFigureOut">
               <a:rPr lang="en-IN" smtClean="0"/>
-              <a:t>13-02-2026</a:t>
+              <a:t>09-04-2026</a:t>
             </a:fld>
             <a:endParaRPr lang="en-IN"/>
           </a:p>
@@ -1329,7 +1333,7 @@
           <a:p>
             <a:fld id="{3E387D70-1183-4AF0-B0A1-0C462F4564CD}" type="datetimeFigureOut">
               <a:rPr lang="en-IN" smtClean="0"/>
-              <a:t>13-02-2026</a:t>
+              <a:t>09-04-2026</a:t>
             </a:fld>
             <a:endParaRPr lang="en-IN"/>
           </a:p>
@@ -1604,7 +1608,7 @@
           <a:p>
             <a:fld id="{3E387D70-1183-4AF0-B0A1-0C462F4564CD}" type="datetimeFigureOut">
               <a:rPr lang="en-IN" smtClean="0"/>
-              <a:t>13-02-2026</a:t>
+              <a:t>09-04-2026</a:t>
             </a:fld>
             <a:endParaRPr lang="en-IN"/>
           </a:p>
@@ -1983,7 +1987,7 @@
           <a:p>
             <a:fld id="{3E387D70-1183-4AF0-B0A1-0C462F4564CD}" type="datetimeFigureOut">
               <a:rPr lang="en-IN" smtClean="0"/>
-              <a:t>13-02-2026</a:t>
+              <a:t>09-04-2026</a:t>
             </a:fld>
             <a:endParaRPr lang="en-IN"/>
           </a:p>
@@ -2101,7 +2105,7 @@
           <a:p>
             <a:fld id="{3E387D70-1183-4AF0-B0A1-0C462F4564CD}" type="datetimeFigureOut">
               <a:rPr lang="en-IN" smtClean="0"/>
-              <a:t>13-02-2026</a:t>
+              <a:t>09-04-2026</a:t>
             </a:fld>
             <a:endParaRPr lang="en-IN"/>
           </a:p>
@@ -2272,7 +2276,7 @@
           <a:p>
             <a:fld id="{3E387D70-1183-4AF0-B0A1-0C462F4564CD}" type="datetimeFigureOut">
               <a:rPr lang="en-IN" smtClean="0"/>
-              <a:t>13-02-2026</a:t>
+              <a:t>09-04-2026</a:t>
             </a:fld>
             <a:endParaRPr lang="en-IN"/>
           </a:p>
@@ -2626,7 +2630,7 @@
           <a:p>
             <a:fld id="{3E387D70-1183-4AF0-B0A1-0C462F4564CD}" type="datetimeFigureOut">
               <a:rPr lang="en-IN" smtClean="0"/>
-              <a:t>13-02-2026</a:t>
+              <a:t>09-04-2026</a:t>
             </a:fld>
             <a:endParaRPr lang="en-IN"/>
           </a:p>
@@ -3008,7 +3012,7 @@
           <a:p>
             <a:fld id="{3E387D70-1183-4AF0-B0A1-0C462F4564CD}" type="datetimeFigureOut">
               <a:rPr lang="en-IN" smtClean="0"/>
-              <a:t>13-02-2026</a:t>
+              <a:t>09-04-2026</a:t>
             </a:fld>
             <a:endParaRPr lang="en-IN"/>
           </a:p>
@@ -3295,7 +3299,7 @@
           <a:p>
             <a:fld id="{3E387D70-1183-4AF0-B0A1-0C462F4564CD}" type="datetimeFigureOut">
               <a:rPr lang="en-IN" smtClean="0"/>
-              <a:t>13-02-2026</a:t>
+              <a:t>09-04-2026</a:t>
             </a:fld>
             <a:endParaRPr lang="en-IN"/>
           </a:p>
@@ -3983,6 +3987,439 @@
   <p:cSld>
     <p:spTree>
       <p:nvGrpSpPr>
+        <p:cNvPr id="1" name="">
+          <a:extLst>
+            <a:ext uri="{FF2B5EF4-FFF2-40B4-BE49-F238E27FC236}">
+              <a16:creationId xmlns:a16="http://schemas.microsoft.com/office/drawing/2014/main" id="{278AB76D-40A9-AEA0-5C3A-D02C6A619083}"/>
+            </a:ext>
+          </a:extLst>
+        </p:cNvPr>
+        <p:cNvGrpSpPr/>
+        <p:nvPr/>
+      </p:nvGrpSpPr>
+      <p:grpSpPr>
+        <a:xfrm>
+          <a:off x="0" y="0"/>
+          <a:ext cx="0" cy="0"/>
+          <a:chOff x="0" y="0"/>
+          <a:chExt cx="0" cy="0"/>
+        </a:xfrm>
+      </p:grpSpPr>
+      <p:sp>
+        <p:nvSpPr>
+          <p:cNvPr id="2" name="Title 1">
+            <a:extLst>
+              <a:ext uri="{FF2B5EF4-FFF2-40B4-BE49-F238E27FC236}">
+                <a16:creationId xmlns:a16="http://schemas.microsoft.com/office/drawing/2014/main" id="{C3DA9D15-5D76-8BD4-5DCC-767522453541}"/>
+              </a:ext>
+            </a:extLst>
+          </p:cNvPr>
+          <p:cNvSpPr>
+            <a:spLocks noGrp="1"/>
+          </p:cNvSpPr>
+          <p:nvPr>
+            <p:ph type="title"/>
+          </p:nvPr>
+        </p:nvSpPr>
+        <p:spPr/>
+        <p:txBody>
+          <a:bodyPr>
+            <a:normAutofit/>
+          </a:bodyPr>
+          <a:lstStyle/>
+          <a:p>
+            <a:pPr algn="ctr"/>
+            <a:r>
+              <a:rPr lang="en-US" sz="6600" b="1" dirty="0"/>
+              <a:t>Phase 3</a:t>
+            </a:r>
+            <a:endParaRPr lang="en-IN" sz="6600" b="1" dirty="0"/>
+          </a:p>
+        </p:txBody>
+      </p:sp>
+      <p:sp>
+        <p:nvSpPr>
+          <p:cNvPr id="3" name="Content Placeholder 2">
+            <a:extLst>
+              <a:ext uri="{FF2B5EF4-FFF2-40B4-BE49-F238E27FC236}">
+                <a16:creationId xmlns:a16="http://schemas.microsoft.com/office/drawing/2014/main" id="{D436987E-620E-58B1-2B60-708A3E6AC524}"/>
+              </a:ext>
+            </a:extLst>
+          </p:cNvPr>
+          <p:cNvSpPr>
+            <a:spLocks noGrp="1"/>
+          </p:cNvSpPr>
+          <p:nvPr>
+            <p:ph idx="1"/>
+          </p:nvPr>
+        </p:nvSpPr>
+        <p:spPr/>
+        <p:txBody>
+          <a:bodyPr>
+            <a:normAutofit/>
+          </a:bodyPr>
+          <a:lstStyle/>
+          <a:p>
+            <a:pPr>
+              <a:buFont typeface="Wingdings" panose="05000000000000000000" pitchFamily="2" charset="2"/>
+              <a:buChar char="Ø"/>
+            </a:pPr>
+            <a:r>
+              <a:rPr lang="en-US" sz="3600" dirty="0"/>
+              <a:t>Trained on full dataset</a:t>
+            </a:r>
+          </a:p>
+          <a:p>
+            <a:pPr>
+              <a:buFont typeface="Wingdings" panose="05000000000000000000" pitchFamily="2" charset="2"/>
+              <a:buChar char="Ø"/>
+            </a:pPr>
+            <a:r>
+              <a:rPr lang="en-US" sz="3600" dirty="0"/>
+              <a:t>UI MVP developed</a:t>
+            </a:r>
+          </a:p>
+          <a:p>
+            <a:pPr>
+              <a:buFont typeface="Wingdings" panose="05000000000000000000" pitchFamily="2" charset="2"/>
+              <a:buChar char="Ø"/>
+            </a:pPr>
+            <a:r>
+              <a:rPr lang="en-US" sz="3600" dirty="0"/>
+              <a:t>Accuracy </a:t>
+            </a:r>
+            <a:r>
+              <a:rPr lang="en-US" sz="3600"/>
+              <a:t>= 85.4</a:t>
+            </a:r>
+            <a:r>
+              <a:rPr lang="en-US" sz="3600" dirty="0"/>
+              <a:t>% accuracy</a:t>
+            </a:r>
+          </a:p>
+        </p:txBody>
+      </p:sp>
+    </p:spTree>
+    <p:extLst>
+      <p:ext uri="{BB962C8B-B14F-4D97-AF65-F5344CB8AC3E}">
+        <p14:creationId xmlns:p14="http://schemas.microsoft.com/office/powerpoint/2010/main" val="4246250858"/>
+      </p:ext>
+    </p:extLst>
+  </p:cSld>
+  <p:clrMapOvr>
+    <a:masterClrMapping/>
+  </p:clrMapOvr>
+</p:sld>
+</file>
+
+<file path=ppt/slides/slide11.xml><?xml version="1.0" encoding="utf-8"?>
+<p:sld xmlns:a="http://schemas.openxmlformats.org/drawingml/2006/main" xmlns:r="http://schemas.openxmlformats.org/officeDocument/2006/relationships" xmlns:p="http://schemas.openxmlformats.org/presentationml/2006/main">
+  <p:cSld>
+    <p:spTree>
+      <p:nvGrpSpPr>
+        <p:cNvPr id="1" name=""/>
+        <p:cNvGrpSpPr/>
+        <p:nvPr/>
+      </p:nvGrpSpPr>
+      <p:grpSpPr>
+        <a:xfrm>
+          <a:off x="0" y="0"/>
+          <a:ext cx="0" cy="0"/>
+          <a:chOff x="0" y="0"/>
+          <a:chExt cx="0" cy="0"/>
+        </a:xfrm>
+      </p:grpSpPr>
+      <p:pic>
+        <p:nvPicPr>
+          <p:cNvPr id="3" name="Picture 2">
+            <a:extLst>
+              <a:ext uri="{FF2B5EF4-FFF2-40B4-BE49-F238E27FC236}">
+                <a16:creationId xmlns:a16="http://schemas.microsoft.com/office/drawing/2014/main" id="{58A50103-CBBF-68B9-A674-A80CB6FF8FBB}"/>
+              </a:ext>
+            </a:extLst>
+          </p:cNvPr>
+          <p:cNvPicPr>
+            <a:picLocks noChangeAspect="1"/>
+          </p:cNvPicPr>
+          <p:nvPr/>
+        </p:nvPicPr>
+        <p:blipFill>
+          <a:blip r:embed="rId2"/>
+          <a:stretch>
+            <a:fillRect/>
+          </a:stretch>
+        </p:blipFill>
+        <p:spPr>
+          <a:xfrm>
+            <a:off x="0" y="1390"/>
+            <a:ext cx="12192000" cy="6855220"/>
+          </a:xfrm>
+          <a:prstGeom prst="rect">
+            <a:avLst/>
+          </a:prstGeom>
+        </p:spPr>
+      </p:pic>
+    </p:spTree>
+    <p:extLst>
+      <p:ext uri="{BB962C8B-B14F-4D97-AF65-F5344CB8AC3E}">
+        <p14:creationId xmlns:p14="http://schemas.microsoft.com/office/powerpoint/2010/main" val="1033103451"/>
+      </p:ext>
+    </p:extLst>
+  </p:cSld>
+  <p:clrMapOvr>
+    <a:masterClrMapping/>
+  </p:clrMapOvr>
+</p:sld>
+</file>
+
+<file path=ppt/slides/slide12.xml><?xml version="1.0" encoding="utf-8"?>
+<p:sld xmlns:a="http://schemas.openxmlformats.org/drawingml/2006/main" xmlns:r="http://schemas.openxmlformats.org/officeDocument/2006/relationships" xmlns:p="http://schemas.openxmlformats.org/presentationml/2006/main">
+  <p:cSld>
+    <p:spTree>
+      <p:nvGrpSpPr>
+        <p:cNvPr id="1" name="">
+          <a:extLst>
+            <a:ext uri="{FF2B5EF4-FFF2-40B4-BE49-F238E27FC236}">
+              <a16:creationId xmlns:a16="http://schemas.microsoft.com/office/drawing/2014/main" id="{BCE5F326-EA1B-D583-EE4A-EB181648C37D}"/>
+            </a:ext>
+          </a:extLst>
+        </p:cNvPr>
+        <p:cNvGrpSpPr/>
+        <p:nvPr/>
+      </p:nvGrpSpPr>
+      <p:grpSpPr>
+        <a:xfrm>
+          <a:off x="0" y="0"/>
+          <a:ext cx="0" cy="0"/>
+          <a:chOff x="0" y="0"/>
+          <a:chExt cx="0" cy="0"/>
+        </a:xfrm>
+      </p:grpSpPr>
+      <p:sp>
+        <p:nvSpPr>
+          <p:cNvPr id="2" name="Title 1">
+            <a:extLst>
+              <a:ext uri="{FF2B5EF4-FFF2-40B4-BE49-F238E27FC236}">
+                <a16:creationId xmlns:a16="http://schemas.microsoft.com/office/drawing/2014/main" id="{0A461990-CA1C-E2A9-DBF1-42C434CD7D89}"/>
+              </a:ext>
+            </a:extLst>
+          </p:cNvPr>
+          <p:cNvSpPr>
+            <a:spLocks noGrp="1"/>
+          </p:cNvSpPr>
+          <p:nvPr>
+            <p:ph type="title"/>
+          </p:nvPr>
+        </p:nvSpPr>
+        <p:spPr/>
+        <p:txBody>
+          <a:bodyPr>
+            <a:normAutofit/>
+          </a:bodyPr>
+          <a:lstStyle/>
+          <a:p>
+            <a:pPr algn="ctr"/>
+            <a:r>
+              <a:rPr lang="en-US" sz="6600" b="1" dirty="0"/>
+              <a:t>Future works</a:t>
+            </a:r>
+            <a:endParaRPr lang="en-IN" sz="6600" b="1" dirty="0"/>
+          </a:p>
+        </p:txBody>
+      </p:sp>
+      <p:sp>
+        <p:nvSpPr>
+          <p:cNvPr id="3" name="Content Placeholder 2">
+            <a:extLst>
+              <a:ext uri="{FF2B5EF4-FFF2-40B4-BE49-F238E27FC236}">
+                <a16:creationId xmlns:a16="http://schemas.microsoft.com/office/drawing/2014/main" id="{109EB871-57C7-07D4-C5E3-99F6DBB98FB1}"/>
+              </a:ext>
+            </a:extLst>
+          </p:cNvPr>
+          <p:cNvSpPr>
+            <a:spLocks noGrp="1"/>
+          </p:cNvSpPr>
+          <p:nvPr>
+            <p:ph idx="1"/>
+          </p:nvPr>
+        </p:nvSpPr>
+        <p:spPr/>
+        <p:txBody>
+          <a:bodyPr>
+            <a:normAutofit/>
+          </a:bodyPr>
+          <a:lstStyle/>
+          <a:p>
+            <a:pPr>
+              <a:buFont typeface="Wingdings" panose="05000000000000000000" pitchFamily="2" charset="2"/>
+              <a:buChar char="Ø"/>
+            </a:pPr>
+            <a:r>
+              <a:rPr lang="en-US" sz="3600" dirty="0"/>
+              <a:t>Make CNN with better architecture</a:t>
+            </a:r>
+          </a:p>
+          <a:p>
+            <a:pPr>
+              <a:buFont typeface="Wingdings" panose="05000000000000000000" pitchFamily="2" charset="2"/>
+              <a:buChar char="Ø"/>
+            </a:pPr>
+            <a:r>
+              <a:rPr lang="en-US" sz="3600" dirty="0"/>
+              <a:t>Seamless integration in web app</a:t>
+            </a:r>
+          </a:p>
+          <a:p>
+            <a:pPr>
+              <a:buFont typeface="Wingdings" panose="05000000000000000000" pitchFamily="2" charset="2"/>
+              <a:buChar char="Ø"/>
+            </a:pPr>
+            <a:r>
+              <a:rPr lang="en-US" sz="3600" dirty="0"/>
+              <a:t>DB Connection &amp; Auth Verifications</a:t>
+            </a:r>
+          </a:p>
+        </p:txBody>
+      </p:sp>
+    </p:spTree>
+    <p:extLst>
+      <p:ext uri="{BB962C8B-B14F-4D97-AF65-F5344CB8AC3E}">
+        <p14:creationId xmlns:p14="http://schemas.microsoft.com/office/powerpoint/2010/main" val="3718324189"/>
+      </p:ext>
+    </p:extLst>
+  </p:cSld>
+  <p:clrMapOvr>
+    <a:masterClrMapping/>
+  </p:clrMapOvr>
+</p:sld>
+</file>
+
+<file path=ppt/slides/slide13.xml><?xml version="1.0" encoding="utf-8"?>
+<p:sld xmlns:a="http://schemas.openxmlformats.org/drawingml/2006/main" xmlns:r="http://schemas.openxmlformats.org/officeDocument/2006/relationships" xmlns:p="http://schemas.openxmlformats.org/presentationml/2006/main">
+  <p:cSld>
+    <p:spTree>
+      <p:nvGrpSpPr>
+        <p:cNvPr id="1" name=""/>
+        <p:cNvGrpSpPr/>
+        <p:nvPr/>
+      </p:nvGrpSpPr>
+      <p:grpSpPr>
+        <a:xfrm>
+          <a:off x="0" y="0"/>
+          <a:ext cx="0" cy="0"/>
+          <a:chOff x="0" y="0"/>
+          <a:chExt cx="0" cy="0"/>
+        </a:xfrm>
+      </p:grpSpPr>
+      <p:sp>
+        <p:nvSpPr>
+          <p:cNvPr id="2" name="Title 1">
+            <a:extLst>
+              <a:ext uri="{FF2B5EF4-FFF2-40B4-BE49-F238E27FC236}">
+                <a16:creationId xmlns:a16="http://schemas.microsoft.com/office/drawing/2014/main" id="{2D568E15-6E84-C9D0-0A46-5EF0A2C5F75A}"/>
+              </a:ext>
+            </a:extLst>
+          </p:cNvPr>
+          <p:cNvSpPr>
+            <a:spLocks noGrp="1"/>
+          </p:cNvSpPr>
+          <p:nvPr>
+            <p:ph type="title"/>
+          </p:nvPr>
+        </p:nvSpPr>
+        <p:spPr/>
+        <p:txBody>
+          <a:bodyPr>
+            <a:normAutofit/>
+          </a:bodyPr>
+          <a:lstStyle/>
+          <a:p>
+            <a:r>
+              <a:rPr lang="en-IN" sz="6000" dirty="0"/>
+              <a:t>Business Model</a:t>
+            </a:r>
+          </a:p>
+        </p:txBody>
+      </p:sp>
+      <p:sp>
+        <p:nvSpPr>
+          <p:cNvPr id="3" name="Content Placeholder 2">
+            <a:extLst>
+              <a:ext uri="{FF2B5EF4-FFF2-40B4-BE49-F238E27FC236}">
+                <a16:creationId xmlns:a16="http://schemas.microsoft.com/office/drawing/2014/main" id="{FFCCEE95-94DF-9AE7-702D-6C4DBE179BF3}"/>
+              </a:ext>
+            </a:extLst>
+          </p:cNvPr>
+          <p:cNvSpPr>
+            <a:spLocks noGrp="1"/>
+          </p:cNvSpPr>
+          <p:nvPr>
+            <p:ph idx="1"/>
+          </p:nvPr>
+        </p:nvSpPr>
+        <p:spPr/>
+        <p:txBody>
+          <a:bodyPr>
+            <a:normAutofit/>
+          </a:bodyPr>
+          <a:lstStyle/>
+          <a:p>
+            <a:pPr>
+              <a:buFont typeface="Wingdings" panose="05000000000000000000" pitchFamily="2" charset="2"/>
+              <a:buChar char="v"/>
+            </a:pPr>
+            <a:endParaRPr lang="en-IN" sz="2800" dirty="0"/>
+          </a:p>
+          <a:p>
+            <a:pPr>
+              <a:buFont typeface="Wingdings" panose="05000000000000000000" pitchFamily="2" charset="2"/>
+              <a:buChar char="v"/>
+            </a:pPr>
+            <a:r>
+              <a:rPr lang="en-IN" sz="2800" dirty="0"/>
+              <a:t>B2B licensing to institutions</a:t>
+            </a:r>
+          </a:p>
+          <a:p>
+            <a:pPr>
+              <a:buFont typeface="Wingdings" panose="05000000000000000000" pitchFamily="2" charset="2"/>
+              <a:buChar char="v"/>
+            </a:pPr>
+            <a:r>
+              <a:rPr lang="en-IN" sz="2800" dirty="0"/>
+              <a:t>Subscription model for schools/colleges</a:t>
+            </a:r>
+          </a:p>
+          <a:p>
+            <a:pPr>
+              <a:buFont typeface="Wingdings" panose="05000000000000000000" pitchFamily="2" charset="2"/>
+              <a:buChar char="v"/>
+            </a:pPr>
+            <a:r>
+              <a:rPr lang="en-IN" sz="2800" dirty="0"/>
+              <a:t>EdTech Platform Integration free</a:t>
+            </a:r>
+          </a:p>
+        </p:txBody>
+      </p:sp>
+    </p:spTree>
+    <p:extLst>
+      <p:ext uri="{BB962C8B-B14F-4D97-AF65-F5344CB8AC3E}">
+        <p14:creationId xmlns:p14="http://schemas.microsoft.com/office/powerpoint/2010/main" val="3691024236"/>
+      </p:ext>
+    </p:extLst>
+  </p:cSld>
+  <p:clrMapOvr>
+    <a:masterClrMapping/>
+  </p:clrMapOvr>
+</p:sld>
+</file>
+
+<file path=ppt/slides/slide14.xml><?xml version="1.0" encoding="utf-8"?>
+<p:sld xmlns:a="http://schemas.openxmlformats.org/drawingml/2006/main" xmlns:r="http://schemas.openxmlformats.org/officeDocument/2006/relationships" xmlns:p="http://schemas.openxmlformats.org/presentationml/2006/main">
+  <p:cSld>
+    <p:spTree>
+      <p:nvGrpSpPr>
         <p:cNvPr id="1" name=""/>
         <p:cNvGrpSpPr/>
         <p:nvPr/>
@@ -4111,7 +4548,7 @@
 </p:sld>
 </file>
 
-<file path=ppt/slides/slide11.xml><?xml version="1.0" encoding="utf-8"?>
+<file path=ppt/slides/slide15.xml><?xml version="1.0" encoding="utf-8"?>
 <p:sld xmlns:a="http://schemas.openxmlformats.org/drawingml/2006/main" xmlns:r="http://schemas.openxmlformats.org/officeDocument/2006/relationships" xmlns:p="http://schemas.openxmlformats.org/presentationml/2006/main">
   <p:cSld>
     <p:spTree>
@@ -4621,121 +5058,6 @@
 </file>
 
 <file path=ppt/slides/slide5.xml><?xml version="1.0" encoding="utf-8"?>
-<p:sld xmlns:a="http://schemas.openxmlformats.org/drawingml/2006/main" xmlns:r="http://schemas.openxmlformats.org/officeDocument/2006/relationships" xmlns:p="http://schemas.openxmlformats.org/presentationml/2006/main">
-  <p:cSld>
-    <p:spTree>
-      <p:nvGrpSpPr>
-        <p:cNvPr id="1" name=""/>
-        <p:cNvGrpSpPr/>
-        <p:nvPr/>
-      </p:nvGrpSpPr>
-      <p:grpSpPr>
-        <a:xfrm>
-          <a:off x="0" y="0"/>
-          <a:ext cx="0" cy="0"/>
-          <a:chOff x="0" y="0"/>
-          <a:chExt cx="0" cy="0"/>
-        </a:xfrm>
-      </p:grpSpPr>
-      <p:sp>
-        <p:nvSpPr>
-          <p:cNvPr id="2" name="Title 1">
-            <a:extLst>
-              <a:ext uri="{FF2B5EF4-FFF2-40B4-BE49-F238E27FC236}">
-                <a16:creationId xmlns:a16="http://schemas.microsoft.com/office/drawing/2014/main" id="{306D8CBA-E62E-05B4-DC17-59B148B5C73A}"/>
-              </a:ext>
-            </a:extLst>
-          </p:cNvPr>
-          <p:cNvSpPr>
-            <a:spLocks noGrp="1"/>
-          </p:cNvSpPr>
-          <p:nvPr>
-            <p:ph type="title"/>
-          </p:nvPr>
-        </p:nvSpPr>
-        <p:spPr/>
-        <p:txBody>
-          <a:bodyPr>
-            <a:normAutofit/>
-          </a:bodyPr>
-          <a:lstStyle/>
-          <a:p>
-            <a:r>
-              <a:rPr lang="en-US" sz="6000" dirty="0"/>
-              <a:t>Key Features</a:t>
-            </a:r>
-            <a:endParaRPr lang="en-IN" sz="6000" dirty="0"/>
-          </a:p>
-        </p:txBody>
-      </p:sp>
-      <p:sp>
-        <p:nvSpPr>
-          <p:cNvPr id="3" name="Content Placeholder 2">
-            <a:extLst>
-              <a:ext uri="{FF2B5EF4-FFF2-40B4-BE49-F238E27FC236}">
-                <a16:creationId xmlns:a16="http://schemas.microsoft.com/office/drawing/2014/main" id="{3050754F-B5F6-A7B2-48FF-DBB1291146CB}"/>
-              </a:ext>
-            </a:extLst>
-          </p:cNvPr>
-          <p:cNvSpPr>
-            <a:spLocks noGrp="1"/>
-          </p:cNvSpPr>
-          <p:nvPr>
-            <p:ph idx="1"/>
-          </p:nvPr>
-        </p:nvSpPr>
-        <p:spPr/>
-        <p:txBody>
-          <a:bodyPr>
-            <a:normAutofit/>
-          </a:bodyPr>
-          <a:lstStyle/>
-          <a:p>
-            <a:pPr>
-              <a:buFont typeface="Wingdings" panose="05000000000000000000" pitchFamily="2" charset="2"/>
-              <a:buChar char="v"/>
-            </a:pPr>
-            <a:r>
-              <a:rPr lang="en-IN" sz="2800" dirty="0"/>
-              <a:t>Vocab recognition.</a:t>
-            </a:r>
-          </a:p>
-          <a:p>
-            <a:pPr>
-              <a:buFont typeface="Wingdings" panose="05000000000000000000" pitchFamily="2" charset="2"/>
-              <a:buChar char="v"/>
-            </a:pPr>
-            <a:r>
-              <a:rPr lang="en-IN" sz="2800" dirty="0"/>
-              <a:t>Templated notes output.</a:t>
-            </a:r>
-          </a:p>
-          <a:p>
-            <a:pPr>
-              <a:buFont typeface="Wingdings" panose="05000000000000000000" pitchFamily="2" charset="2"/>
-              <a:buChar char="v"/>
-            </a:pPr>
-            <a:r>
-              <a:rPr lang="en-IN" sz="2800" dirty="0"/>
-              <a:t>Confidence indicator + pose overlay for explainability.</a:t>
-            </a:r>
-          </a:p>
-        </p:txBody>
-      </p:sp>
-    </p:spTree>
-    <p:extLst>
-      <p:ext uri="{BB962C8B-B14F-4D97-AF65-F5344CB8AC3E}">
-        <p14:creationId xmlns:p14="http://schemas.microsoft.com/office/powerpoint/2010/main" val="3249160115"/>
-      </p:ext>
-    </p:extLst>
-  </p:cSld>
-  <p:clrMapOvr>
-    <a:masterClrMapping/>
-  </p:clrMapOvr>
-</p:sld>
-</file>
-
-<file path=ppt/slides/slide6.xml><?xml version="1.0" encoding="utf-8"?>
 <p:sld xmlns:a="http://schemas.openxmlformats.org/drawingml/2006/main" xmlns:r="http://schemas.openxmlformats.org/officeDocument/2006/relationships" xmlns:p="http://schemas.openxmlformats.org/presentationml/2006/main">
   <p:cSld>
     <p:spTree>
@@ -4838,7 +5160,7 @@
 </p:sld>
 </file>
 
-<file path=ppt/slides/slide7.xml><?xml version="1.0" encoding="utf-8"?>
+<file path=ppt/slides/slide6.xml><?xml version="1.0" encoding="utf-8"?>
 <p:sld xmlns:a="http://schemas.openxmlformats.org/drawingml/2006/main" xmlns:r="http://schemas.openxmlformats.org/officeDocument/2006/relationships" xmlns:p="http://schemas.openxmlformats.org/presentationml/2006/main">
   <p:cSld>
     <p:spTree>
@@ -5111,7 +5433,261 @@
 </p:sld>
 </file>
 
+<file path=ppt/slides/slide7.xml><?xml version="1.0" encoding="utf-8"?>
+<p:sld xmlns:a="http://schemas.openxmlformats.org/drawingml/2006/main" xmlns:r="http://schemas.openxmlformats.org/officeDocument/2006/relationships" xmlns:p="http://schemas.openxmlformats.org/presentationml/2006/main">
+  <p:cSld>
+    <p:spTree>
+      <p:nvGrpSpPr>
+        <p:cNvPr id="1" name=""/>
+        <p:cNvGrpSpPr/>
+        <p:nvPr/>
+      </p:nvGrpSpPr>
+      <p:grpSpPr>
+        <a:xfrm>
+          <a:off x="0" y="0"/>
+          <a:ext cx="0" cy="0"/>
+          <a:chOff x="0" y="0"/>
+          <a:chExt cx="0" cy="0"/>
+        </a:xfrm>
+      </p:grpSpPr>
+      <p:sp>
+        <p:nvSpPr>
+          <p:cNvPr id="2" name="Title 1">
+            <a:extLst>
+              <a:ext uri="{FF2B5EF4-FFF2-40B4-BE49-F238E27FC236}">
+                <a16:creationId xmlns:a16="http://schemas.microsoft.com/office/drawing/2014/main" id="{9398193C-B6A3-3053-99C3-4693FCFB7493}"/>
+              </a:ext>
+            </a:extLst>
+          </p:cNvPr>
+          <p:cNvSpPr>
+            <a:spLocks noGrp="1"/>
+          </p:cNvSpPr>
+          <p:nvPr>
+            <p:ph type="title"/>
+          </p:nvPr>
+        </p:nvSpPr>
+        <p:spPr/>
+        <p:txBody>
+          <a:bodyPr>
+            <a:normAutofit/>
+          </a:bodyPr>
+          <a:lstStyle/>
+          <a:p>
+            <a:pPr algn="ctr"/>
+            <a:r>
+              <a:rPr lang="en-US" sz="6600" b="1" dirty="0"/>
+              <a:t>Phase 1</a:t>
+            </a:r>
+            <a:endParaRPr lang="en-IN" sz="6600" b="1" dirty="0"/>
+          </a:p>
+        </p:txBody>
+      </p:sp>
+      <p:sp>
+        <p:nvSpPr>
+          <p:cNvPr id="3" name="Content Placeholder 2">
+            <a:extLst>
+              <a:ext uri="{FF2B5EF4-FFF2-40B4-BE49-F238E27FC236}">
+                <a16:creationId xmlns:a16="http://schemas.microsoft.com/office/drawing/2014/main" id="{C37A4F65-993E-AB5D-AF89-572016B2F01C}"/>
+              </a:ext>
+            </a:extLst>
+          </p:cNvPr>
+          <p:cNvSpPr>
+            <a:spLocks noGrp="1"/>
+          </p:cNvSpPr>
+          <p:nvPr>
+            <p:ph idx="1"/>
+          </p:nvPr>
+        </p:nvSpPr>
+        <p:spPr/>
+        <p:txBody>
+          <a:bodyPr>
+            <a:normAutofit/>
+          </a:bodyPr>
+          <a:lstStyle/>
+          <a:p>
+            <a:pPr>
+              <a:buFont typeface="Wingdings" panose="05000000000000000000" pitchFamily="2" charset="2"/>
+              <a:buChar char="Ø"/>
+            </a:pPr>
+            <a:r>
+              <a:rPr lang="en-US" sz="3600" dirty="0"/>
+              <a:t>Requirements analyzed</a:t>
+            </a:r>
+          </a:p>
+          <a:p>
+            <a:pPr>
+              <a:buFont typeface="Wingdings" panose="05000000000000000000" pitchFamily="2" charset="2"/>
+              <a:buChar char="Ø"/>
+            </a:pPr>
+            <a:r>
+              <a:rPr lang="en-US" sz="3600" dirty="0"/>
+              <a:t>Dataset preprocessed</a:t>
+            </a:r>
+          </a:p>
+          <a:p>
+            <a:pPr>
+              <a:buFont typeface="Wingdings" panose="05000000000000000000" pitchFamily="2" charset="2"/>
+              <a:buChar char="Ø"/>
+            </a:pPr>
+            <a:r>
+              <a:rPr lang="en-US" sz="3600" dirty="0"/>
+              <a:t>Blueprint of working model theorized</a:t>
+            </a:r>
+            <a:endParaRPr lang="en-IN" sz="3600" dirty="0"/>
+          </a:p>
+        </p:txBody>
+      </p:sp>
+    </p:spTree>
+    <p:extLst>
+      <p:ext uri="{BB962C8B-B14F-4D97-AF65-F5344CB8AC3E}">
+        <p14:creationId xmlns:p14="http://schemas.microsoft.com/office/powerpoint/2010/main" val="4283391359"/>
+      </p:ext>
+    </p:extLst>
+  </p:cSld>
+  <p:clrMapOvr>
+    <a:masterClrMapping/>
+  </p:clrMapOvr>
+</p:sld>
+</file>
+
 <file path=ppt/slides/slide8.xml><?xml version="1.0" encoding="utf-8"?>
+<p:sld xmlns:a="http://schemas.openxmlformats.org/drawingml/2006/main" xmlns:r="http://schemas.openxmlformats.org/officeDocument/2006/relationships" xmlns:p="http://schemas.openxmlformats.org/presentationml/2006/main">
+  <p:cSld>
+    <p:spTree>
+      <p:nvGrpSpPr>
+        <p:cNvPr id="1" name="">
+          <a:extLst>
+            <a:ext uri="{FF2B5EF4-FFF2-40B4-BE49-F238E27FC236}">
+              <a16:creationId xmlns:a16="http://schemas.microsoft.com/office/drawing/2014/main" id="{3D2B4503-BB72-9416-006A-5D83DB6D1640}"/>
+            </a:ext>
+          </a:extLst>
+        </p:cNvPr>
+        <p:cNvGrpSpPr/>
+        <p:nvPr/>
+      </p:nvGrpSpPr>
+      <p:grpSpPr>
+        <a:xfrm>
+          <a:off x="0" y="0"/>
+          <a:ext cx="0" cy="0"/>
+          <a:chOff x="0" y="0"/>
+          <a:chExt cx="0" cy="0"/>
+        </a:xfrm>
+      </p:grpSpPr>
+      <p:sp>
+        <p:nvSpPr>
+          <p:cNvPr id="2" name="Title 1">
+            <a:extLst>
+              <a:ext uri="{FF2B5EF4-FFF2-40B4-BE49-F238E27FC236}">
+                <a16:creationId xmlns:a16="http://schemas.microsoft.com/office/drawing/2014/main" id="{8B9EA046-058A-7914-5DFA-C2346AE319F8}"/>
+              </a:ext>
+            </a:extLst>
+          </p:cNvPr>
+          <p:cNvSpPr>
+            <a:spLocks noGrp="1"/>
+          </p:cNvSpPr>
+          <p:nvPr>
+            <p:ph type="title"/>
+          </p:nvPr>
+        </p:nvSpPr>
+        <p:spPr/>
+        <p:txBody>
+          <a:bodyPr>
+            <a:normAutofit/>
+          </a:bodyPr>
+          <a:lstStyle/>
+          <a:p>
+            <a:pPr algn="ctr"/>
+            <a:r>
+              <a:rPr lang="en-US" sz="6600" b="1" dirty="0"/>
+              <a:t>Phase 2</a:t>
+            </a:r>
+            <a:endParaRPr lang="en-IN" sz="6600" b="1" dirty="0"/>
+          </a:p>
+        </p:txBody>
+      </p:sp>
+      <p:sp>
+        <p:nvSpPr>
+          <p:cNvPr id="3" name="Content Placeholder 2">
+            <a:extLst>
+              <a:ext uri="{FF2B5EF4-FFF2-40B4-BE49-F238E27FC236}">
+                <a16:creationId xmlns:a16="http://schemas.microsoft.com/office/drawing/2014/main" id="{14223BB0-81A9-797E-953C-251BAF6E81E8}"/>
+              </a:ext>
+            </a:extLst>
+          </p:cNvPr>
+          <p:cNvSpPr>
+            <a:spLocks noGrp="1"/>
+          </p:cNvSpPr>
+          <p:nvPr>
+            <p:ph idx="1"/>
+          </p:nvPr>
+        </p:nvSpPr>
+        <p:spPr/>
+        <p:txBody>
+          <a:bodyPr>
+            <a:normAutofit/>
+          </a:bodyPr>
+          <a:lstStyle/>
+          <a:p>
+            <a:pPr>
+              <a:buFont typeface="Wingdings" panose="05000000000000000000" pitchFamily="2" charset="2"/>
+              <a:buChar char="Ø"/>
+            </a:pPr>
+            <a:r>
+              <a:rPr lang="en-US" sz="3600" dirty="0"/>
+              <a:t>Model trained on 100 classes</a:t>
+            </a:r>
+          </a:p>
+          <a:p>
+            <a:pPr>
+              <a:buFont typeface="Wingdings" panose="05000000000000000000" pitchFamily="2" charset="2"/>
+              <a:buChar char="Ø"/>
+            </a:pPr>
+            <a:r>
+              <a:rPr lang="en-US" sz="3600" dirty="0"/>
+              <a:t>Switched from </a:t>
+            </a:r>
+            <a:r>
+              <a:rPr lang="en-US" sz="3600" dirty="0" err="1"/>
+              <a:t>tf</a:t>
+            </a:r>
+            <a:r>
+              <a:rPr lang="en-US" sz="3600" dirty="0"/>
+              <a:t> to torch due to low accuracy</a:t>
+            </a:r>
+          </a:p>
+          <a:p>
+            <a:pPr>
+              <a:buFont typeface="Wingdings" panose="05000000000000000000" pitchFamily="2" charset="2"/>
+              <a:buChar char="Ø"/>
+            </a:pPr>
+            <a:r>
+              <a:rPr lang="en-US" sz="3600" dirty="0"/>
+              <a:t>Modified CNN architecture for testing</a:t>
+            </a:r>
+          </a:p>
+          <a:p>
+            <a:pPr>
+              <a:buFont typeface="Wingdings" panose="05000000000000000000" pitchFamily="2" charset="2"/>
+              <a:buChar char="Ø"/>
+            </a:pPr>
+            <a:endParaRPr lang="en-IN" sz="3600" dirty="0"/>
+          </a:p>
+        </p:txBody>
+      </p:sp>
+    </p:spTree>
+    <p:extLst>
+      <p:ext uri="{BB962C8B-B14F-4D97-AF65-F5344CB8AC3E}">
+        <p14:creationId xmlns:p14="http://schemas.microsoft.com/office/powerpoint/2010/main" val="2261953491"/>
+      </p:ext>
+    </p:extLst>
+  </p:cSld>
+  <p:clrMapOvr>
+    <a:masterClrMapping/>
+  </p:clrMapOvr>
+</p:sld>
+</file>
+
+<file path=ppt/slides/slide9.xml><?xml version="1.0" encoding="utf-8"?>
 <p:sld xmlns:a="http://schemas.openxmlformats.org/drawingml/2006/main" xmlns:r="http://schemas.openxmlformats.org/officeDocument/2006/relationships" xmlns:p="http://schemas.openxmlformats.org/presentationml/2006/main">
   <p:cSld>
     <p:spTree>
@@ -5240,127 +5816,6 @@
     <p:extLst>
       <p:ext uri="{BB962C8B-B14F-4D97-AF65-F5344CB8AC3E}">
         <p14:creationId xmlns:p14="http://schemas.microsoft.com/office/powerpoint/2010/main" val="3612753817"/>
-      </p:ext>
-    </p:extLst>
-  </p:cSld>
-  <p:clrMapOvr>
-    <a:masterClrMapping/>
-  </p:clrMapOvr>
-</p:sld>
-</file>
-
-<file path=ppt/slides/slide9.xml><?xml version="1.0" encoding="utf-8"?>
-<p:sld xmlns:a="http://schemas.openxmlformats.org/drawingml/2006/main" xmlns:r="http://schemas.openxmlformats.org/officeDocument/2006/relationships" xmlns:p="http://schemas.openxmlformats.org/presentationml/2006/main">
-  <p:cSld>
-    <p:spTree>
-      <p:nvGrpSpPr>
-        <p:cNvPr id="1" name=""/>
-        <p:cNvGrpSpPr/>
-        <p:nvPr/>
-      </p:nvGrpSpPr>
-      <p:grpSpPr>
-        <a:xfrm>
-          <a:off x="0" y="0"/>
-          <a:ext cx="0" cy="0"/>
-          <a:chOff x="0" y="0"/>
-          <a:chExt cx="0" cy="0"/>
-        </a:xfrm>
-      </p:grpSpPr>
-      <p:sp>
-        <p:nvSpPr>
-          <p:cNvPr id="2" name="Title 1">
-            <a:extLst>
-              <a:ext uri="{FF2B5EF4-FFF2-40B4-BE49-F238E27FC236}">
-                <a16:creationId xmlns:a16="http://schemas.microsoft.com/office/drawing/2014/main" id="{2D568E15-6E84-C9D0-0A46-5EF0A2C5F75A}"/>
-              </a:ext>
-            </a:extLst>
-          </p:cNvPr>
-          <p:cNvSpPr>
-            <a:spLocks noGrp="1"/>
-          </p:cNvSpPr>
-          <p:nvPr>
-            <p:ph type="title"/>
-          </p:nvPr>
-        </p:nvSpPr>
-        <p:spPr/>
-        <p:txBody>
-          <a:bodyPr>
-            <a:normAutofit/>
-          </a:bodyPr>
-          <a:lstStyle/>
-          <a:p>
-            <a:r>
-              <a:rPr lang="en-IN" sz="6000" dirty="0"/>
-              <a:t>Business Model</a:t>
-            </a:r>
-          </a:p>
-        </p:txBody>
-      </p:sp>
-      <p:sp>
-        <p:nvSpPr>
-          <p:cNvPr id="3" name="Content Placeholder 2">
-            <a:extLst>
-              <a:ext uri="{FF2B5EF4-FFF2-40B4-BE49-F238E27FC236}">
-                <a16:creationId xmlns:a16="http://schemas.microsoft.com/office/drawing/2014/main" id="{FFCCEE95-94DF-9AE7-702D-6C4DBE179BF3}"/>
-              </a:ext>
-            </a:extLst>
-          </p:cNvPr>
-          <p:cNvSpPr>
-            <a:spLocks noGrp="1"/>
-          </p:cNvSpPr>
-          <p:nvPr>
-            <p:ph idx="1"/>
-          </p:nvPr>
-        </p:nvSpPr>
-        <p:spPr/>
-        <p:txBody>
-          <a:bodyPr>
-            <a:normAutofit/>
-          </a:bodyPr>
-          <a:lstStyle/>
-          <a:p>
-            <a:pPr>
-              <a:buFont typeface="Wingdings" panose="05000000000000000000" pitchFamily="2" charset="2"/>
-              <a:buChar char="v"/>
-            </a:pPr>
-            <a:endParaRPr lang="en-IN" sz="2800" dirty="0"/>
-          </a:p>
-          <a:p>
-            <a:pPr>
-              <a:buFont typeface="Wingdings" panose="05000000000000000000" pitchFamily="2" charset="2"/>
-              <a:buChar char="v"/>
-            </a:pPr>
-            <a:r>
-              <a:rPr lang="en-IN" sz="2800" dirty="0"/>
-              <a:t>B2B licensing to institutions</a:t>
-            </a:r>
-          </a:p>
-          <a:p>
-            <a:pPr>
-              <a:buFont typeface="Wingdings" panose="05000000000000000000" pitchFamily="2" charset="2"/>
-              <a:buChar char="v"/>
-            </a:pPr>
-            <a:r>
-              <a:rPr lang="en-IN" sz="2800" dirty="0"/>
-              <a:t>Subscription model for schools/colleges</a:t>
-            </a:r>
-          </a:p>
-          <a:p>
-            <a:pPr>
-              <a:buFont typeface="Wingdings" panose="05000000000000000000" pitchFamily="2" charset="2"/>
-              <a:buChar char="v"/>
-            </a:pPr>
-            <a:r>
-              <a:rPr lang="en-IN" sz="2800" dirty="0"/>
-              <a:t>EdTech Platform Integration free</a:t>
-            </a:r>
-          </a:p>
-        </p:txBody>
-      </p:sp>
-    </p:spTree>
-    <p:extLst>
-      <p:ext uri="{BB962C8B-B14F-4D97-AF65-F5344CB8AC3E}">
-        <p14:creationId xmlns:p14="http://schemas.microsoft.com/office/powerpoint/2010/main" val="3691024236"/>
       </p:ext>
     </p:extLst>
   </p:cSld>
